--- a/Sprint1_Presentation.pptx
+++ b/Sprint1_Presentation.pptx
@@ -4,6 +4,9 @@
   <p:sldMasterIdLst>
     <p:sldMasterId id="2147483648" r:id="rId1"/>
   </p:sldMasterIdLst>
+  <p:notesMasterIdLst>
+    <p:notesMasterId r:id="rId9"/>
+  </p:notesMasterIdLst>
   <p:sldIdLst>
     <p:sldId id="256" r:id="rId2"/>
     <p:sldId id="257" r:id="rId3"/>
@@ -13,9 +16,6 @@
     <p:sldId id="261" r:id="rId7"/>
     <p:sldId id="262" r:id="rId8"/>
   </p:sldIdLst>
-  <p:notesMasterIdLst>
-    <p:notesMasterId r:id="rId9"/>
-  </p:notesMasterIdLst>
   <p:sldSz cx="12192000" cy="6858000"/>
   <p:notesSz cx="6858000" cy="12192000"/>
   <p:defaultTextStyle>
@@ -110,6 +110,11 @@
       </a:defRPr>
     </a:lvl9pPr>
   </p:defaultTextStyle>
+  <p:extLst>
+    <p:ext uri="{EFAFB233-063F-42B5-8137-9DF3F51BA10A}">
+      <p15:sldGuideLst xmlns:p15="http://schemas.microsoft.com/office/powerpoint/2012/main"/>
+    </p:ext>
+  </p:extLst>
 </p:presentation>
 </file>
 
@@ -135,234 +140,10 @@
           <a:chExt cx="0" cy="0"/>
         </a:xfrm>
       </p:grpSpPr>
-      <p:sp>
-        <p:nvSpPr>
-          <p:cNvPr id="2" name="Header Placeholder 1"/>
-          <p:cNvSpPr>
-            <a:spLocks noGrp="1"/>
-          </p:cNvSpPr>
-          <p:nvPr>
-            <p:ph type="hdr" sz="quarter"/>
-          </p:nvPr>
-        </p:nvSpPr>
-        <p:spPr>
-          <a:xfrm>
-            <a:off x="0" y="0"/>
-            <a:ext cx="2971800" cy="458788"/>
-          </a:xfrm>
-          <a:prstGeom prst="rect">
-            <a:avLst/>
-          </a:prstGeom>
-        </p:spPr>
-        <p:txBody>
-          <a:bodyPr vert="horz" lIns="91440" tIns="45720" rIns="91440" bIns="45720" rtlCol="0"/>
-          <a:lstStyle>
-            <a:lvl1pPr algn="l">
-              <a:defRPr sz="1200"/>
-            </a:lvl1pPr>
-          </a:lstStyle>
-          <a:p>
-            <a:endParaRPr lang="en-US"/>
-          </a:p>
-        </p:txBody>
-      </p:sp>
-      <p:sp>
-        <p:nvSpPr>
-          <p:cNvPr id="3" name="Date Placeholder 2"/>
-          <p:cNvSpPr>
-            <a:spLocks noGrp="1"/>
-          </p:cNvSpPr>
-          <p:nvPr>
-            <p:ph type="dt" idx="1"/>
-          </p:nvPr>
-        </p:nvSpPr>
-        <p:spPr>
-          <a:xfrm>
-            <a:off x="3884613" y="0"/>
-            <a:ext cx="2971800" cy="458788"/>
-          </a:xfrm>
-          <a:prstGeom prst="rect">
-            <a:avLst/>
-          </a:prstGeom>
-        </p:spPr>
-        <p:txBody>
-          <a:bodyPr vert="horz" lIns="91440" tIns="45720" rIns="91440" bIns="45720" rtlCol="0"/>
-          <a:lstStyle>
-            <a:lvl1pPr algn="r">
-              <a:defRPr sz="1200"/>
-            </a:lvl1pPr>
-          </a:lstStyle>
-          <a:p>
-            <a:fld id="{5282F153-3F37-0F45-9E97-73ACFA13230C}" type="datetimeFigureOut">
-              <a:rPr lang="en-US"/>
-              <a:t>7/23/19</a:t>
-            </a:fld>
-            <a:endParaRPr lang="en-US"/>
-          </a:p>
-        </p:txBody>
-      </p:sp>
-      <p:sp>
-        <p:nvSpPr>
-          <p:cNvPr id="4" name="Slide Image Placeholder 3"/>
-          <p:cNvSpPr>
-            <a:spLocks noGrp="1" noRot="1" noChangeAspect="1"/>
-          </p:cNvSpPr>
-          <p:nvPr>
-            <p:ph type="sldImg" idx="2"/>
-          </p:nvPr>
-        </p:nvSpPr>
-        <p:spPr>
-          <a:xfrm>
-            <a:off x="685800" y="1143000"/>
-            <a:ext cx="5486400" cy="3086100"/>
-          </a:xfrm>
-          <a:prstGeom prst="rect">
-            <a:avLst/>
-          </a:prstGeom>
-          <a:noFill/>
-          <a:ln w="12700">
-            <a:solidFill>
-              <a:prstClr val="black"/>
-            </a:solidFill>
-          </a:ln>
-        </p:spPr>
-        <p:txBody>
-          <a:bodyPr vert="horz" lIns="91440" tIns="45720" rIns="91440" bIns="45720" rtlCol="0" anchor="ctr"/>
-          <a:lstStyle/>
-          <a:p>
-            <a:endParaRPr lang="en-US"/>
-          </a:p>
-        </p:txBody>
-      </p:sp>
-      <p:sp>
-        <p:nvSpPr>
-          <p:cNvPr id="5" name="Notes Placeholder 4"/>
-          <p:cNvSpPr>
-            <a:spLocks noGrp="1"/>
-          </p:cNvSpPr>
-          <p:nvPr>
-            <p:ph type="body" sz="quarter" idx="3"/>
-          </p:nvPr>
-        </p:nvSpPr>
-        <p:spPr>
-          <a:xfrm>
-            <a:off x="685800" y="4400550"/>
-            <a:ext cx="5486400" cy="3600450"/>
-          </a:xfrm>
-          <a:prstGeom prst="rect">
-            <a:avLst/>
-          </a:prstGeom>
-        </p:spPr>
-        <p:txBody>
-          <a:bodyPr vert="horz" lIns="91440" tIns="45720" rIns="91440" bIns="45720" rtlCol="0"/>
-          <a:lstStyle/>
-          <a:p>
-            <a:pPr lvl="0"/>
-            <a:r>
-              <a:rPr lang="en-US"/>
-              <a:t>Click to edit Master text styles</a:t>
-            </a:r>
-          </a:p>
-          <a:p>
-            <a:pPr lvl="1"/>
-            <a:r>
-              <a:rPr lang="en-US"/>
-              <a:t>Second level</a:t>
-            </a:r>
-          </a:p>
-          <a:p>
-            <a:pPr lvl="2"/>
-            <a:r>
-              <a:rPr lang="en-US"/>
-              <a:t>Third level</a:t>
-            </a:r>
-          </a:p>
-          <a:p>
-            <a:pPr lvl="3"/>
-            <a:r>
-              <a:rPr lang="en-US"/>
-              <a:t>Fourth level</a:t>
-            </a:r>
-          </a:p>
-          <a:p>
-            <a:pPr lvl="4"/>
-            <a:r>
-              <a:rPr lang="en-US"/>
-              <a:t>Fifth level</a:t>
-            </a:r>
-          </a:p>
-        </p:txBody>
-      </p:sp>
-      <p:sp>
-        <p:nvSpPr>
-          <p:cNvPr id="6" name="Footer Placeholder 5"/>
-          <p:cNvSpPr>
-            <a:spLocks noGrp="1"/>
-          </p:cNvSpPr>
-          <p:nvPr>
-            <p:ph type="ftr" sz="quarter" idx="4"/>
-          </p:nvPr>
-        </p:nvSpPr>
-        <p:spPr>
-          <a:xfrm>
-            <a:off x="0" y="8685213"/>
-            <a:ext cx="2971800" cy="458787"/>
-          </a:xfrm>
-          <a:prstGeom prst="rect">
-            <a:avLst/>
-          </a:prstGeom>
-        </p:spPr>
-        <p:txBody>
-          <a:bodyPr vert="horz" lIns="91440" tIns="45720" rIns="91440" bIns="45720" rtlCol="0" anchor="b"/>
-          <a:lstStyle>
-            <a:lvl1pPr algn="l">
-              <a:defRPr sz="1200"/>
-            </a:lvl1pPr>
-          </a:lstStyle>
-          <a:p>
-            <a:endParaRPr lang="en-US"/>
-          </a:p>
-        </p:txBody>
-      </p:sp>
-      <p:sp>
-        <p:nvSpPr>
-          <p:cNvPr id="7" name="Slide Number Placeholder 6"/>
-          <p:cNvSpPr>
-            <a:spLocks noGrp="1"/>
-          </p:cNvSpPr>
-          <p:nvPr>
-            <p:ph type="sldNum" sz="quarter" idx="5"/>
-          </p:nvPr>
-        </p:nvSpPr>
-        <p:spPr>
-          <a:xfrm>
-            <a:off x="3884613" y="8685213"/>
-            <a:ext cx="2971800" cy="458787"/>
-          </a:xfrm>
-          <a:prstGeom prst="rect">
-            <a:avLst/>
-          </a:prstGeom>
-        </p:spPr>
-        <p:txBody>
-          <a:bodyPr vert="horz" lIns="91440" tIns="45720" rIns="91440" bIns="45720" rtlCol="0" anchor="b"/>
-          <a:lstStyle>
-            <a:lvl1pPr algn="r">
-              <a:defRPr sz="1200"/>
-            </a:lvl1pPr>
-          </a:lstStyle>
-          <a:p>
-            <a:fld id="{CE5E9CC1-C706-0F49-92D6-E571CC5EEA8F}" type="slidenum">
-              <a:rPr lang="en-US"/>
-              <a:t>‹#›</a:t>
-            </a:fld>
-            <a:endParaRPr lang="en-US"/>
-          </a:p>
-        </p:txBody>
-      </p:sp>
     </p:spTree>
     <p:extLst>
       <p:ext uri="{BB962C8B-B14F-4D97-AF65-F5344CB8AC3E}">
-        <p14:creationId xmlns:p14="http://schemas.microsoft.com/office/powerpoint/2010/main" val="1024086991"/>
+        <p14:creationId xmlns:p14="http://schemas.microsoft.com/office/powerpoint/2010/main" val="3614023274"/>
       </p:ext>
     </p:extLst>
   </p:cSld>
@@ -506,10 +287,6 @@
           <a:bodyPr/>
           <a:lstStyle/>
           <a:p>
-            <a:r>
-              <a:rPr lang="en-US" dirty="0"/>
-              <a:t/>
-            </a:r>
             <a:endParaRPr lang="en-US" dirty="0"/>
           </a:p>
         </p:txBody>
@@ -594,10 +371,6 @@
           <a:bodyPr/>
           <a:lstStyle/>
           <a:p>
-            <a:r>
-              <a:rPr lang="en-US" dirty="0"/>
-              <a:t/>
-            </a:r>
             <a:endParaRPr lang="en-US" dirty="0"/>
           </a:p>
         </p:txBody>
@@ -682,10 +455,6 @@
           <a:bodyPr/>
           <a:lstStyle/>
           <a:p>
-            <a:r>
-              <a:rPr lang="en-US" dirty="0"/>
-              <a:t/>
-            </a:r>
             <a:endParaRPr lang="en-US" dirty="0"/>
           </a:p>
         </p:txBody>
@@ -770,10 +539,6 @@
           <a:bodyPr/>
           <a:lstStyle/>
           <a:p>
-            <a:r>
-              <a:rPr lang="en-US" dirty="0"/>
-              <a:t/>
-            </a:r>
             <a:endParaRPr lang="en-US" dirty="0"/>
           </a:p>
         </p:txBody>
@@ -858,10 +623,6 @@
           <a:bodyPr/>
           <a:lstStyle/>
           <a:p>
-            <a:r>
-              <a:rPr lang="en-US" dirty="0"/>
-              <a:t/>
-            </a:r>
             <a:endParaRPr lang="en-US" dirty="0"/>
           </a:p>
         </p:txBody>
@@ -946,10 +707,6 @@
           <a:bodyPr/>
           <a:lstStyle/>
           <a:p>
-            <a:r>
-              <a:rPr lang="en-US" dirty="0"/>
-              <a:t/>
-            </a:r>
             <a:endParaRPr lang="en-US" dirty="0"/>
           </a:p>
         </p:txBody>
@@ -1034,10 +791,6 @@
           <a:bodyPr/>
           <a:lstStyle/>
           <a:p>
-            <a:r>
-              <a:rPr lang="en-US" dirty="0"/>
-              <a:t/>
-            </a:r>
             <a:endParaRPr lang="en-US" dirty="0"/>
           </a:p>
         </p:txBody>
@@ -1116,6 +869,7 @@
         <a:solidFill>
           <a:srgbClr val="14181F"/>
         </a:solidFill>
+        <a:effectLst/>
       </p:bgPr>
     </p:bg>
     <p:spTree>
@@ -1135,7 +889,9 @@
       <p:sp>
         <p:nvSpPr>
           <p:cNvPr id="2" name="Title Placeholder 1"/>
-          <p:cNvSpPr/>
+          <p:cNvSpPr>
+            <a:spLocks noGrp="1"/>
+          </p:cNvSpPr>
           <p:nvPr>
             <p:ph type="title"/>
           </p:nvPr>
@@ -1154,7 +910,7 @@
         <p:txBody>
           <a:bodyPr wrap="square" lIns="0" tIns="0" rIns="0" bIns="0" rtlCol="0" anchor="t"/>
           <a:lstStyle>
-            <a:lvl1pPr algn="l" indent="0" marL="0">
+            <a:lvl1pPr marL="0" indent="0" algn="l">
               <a:lnSpc>
                 <a:spcPct val="115000"/>
               </a:lnSpc>
@@ -1170,7 +926,7 @@
             </a:lvl1pPr>
           </a:lstStyle>
           <a:p>
-            <a:pPr algn="l" indent="0" marL="0">
+            <a:pPr marL="0" indent="0" algn="l">
               <a:lnSpc>
                 <a:spcPct val="115000"/>
               </a:lnSpc>
@@ -1183,9 +939,11 @@
       <p:sp>
         <p:nvSpPr>
           <p:cNvPr id="3" name="Text Placeholder 2"/>
-          <p:cNvSpPr/>
+          <p:cNvSpPr>
+            <a:spLocks noGrp="1"/>
+          </p:cNvSpPr>
           <p:nvPr>
-            <p:ph idx="101" type="body"/>
+            <p:ph type="body" idx="101"/>
           </p:nvPr>
         </p:nvSpPr>
         <p:spPr>
@@ -1202,7 +960,7 @@
         <p:txBody>
           <a:bodyPr wrap="square" lIns="0" tIns="0" rIns="0" bIns="0" rtlCol="0" anchor="t"/>
           <a:lstStyle>
-            <a:lvl1pPr algn="l" indent="0" marL="0">
+            <a:lvl1pPr marL="0" indent="0" algn="l">
               <a:lnSpc>
                 <a:spcPct val="140000"/>
               </a:lnSpc>
@@ -1218,7 +976,7 @@
             </a:lvl1pPr>
           </a:lstStyle>
           <a:p>
-            <a:pPr algn="l" indent="0" marL="0">
+            <a:pPr marL="0" indent="0" algn="l">
               <a:lnSpc>
                 <a:spcPct val="140000"/>
               </a:lnSpc>
@@ -1244,6 +1002,7 @@
         <a:solidFill>
           <a:srgbClr val="14181F"/>
         </a:solidFill>
+        <a:effectLst/>
       </p:bgPr>
     </p:bg>
     <p:spTree>
@@ -1263,7 +1022,9 @@
       <p:sp>
         <p:nvSpPr>
           <p:cNvPr id="2" name="Title Placeholder 1"/>
-          <p:cNvSpPr/>
+          <p:cNvSpPr>
+            <a:spLocks noGrp="1"/>
+          </p:cNvSpPr>
           <p:nvPr>
             <p:ph type="title"/>
           </p:nvPr>
@@ -1282,7 +1043,7 @@
         <p:txBody>
           <a:bodyPr wrap="square" lIns="0" tIns="0" rIns="0" bIns="0" rtlCol="0" anchor="t"/>
           <a:lstStyle>
-            <a:lvl1pPr algn="l" indent="0" marL="0">
+            <a:lvl1pPr marL="0" indent="0" algn="l">
               <a:lnSpc>
                 <a:spcPct val="115000"/>
               </a:lnSpc>
@@ -1298,7 +1059,7 @@
             </a:lvl1pPr>
           </a:lstStyle>
           <a:p>
-            <a:pPr algn="l" indent="0" marL="0">
+            <a:pPr marL="0" indent="0" algn="l">
               <a:lnSpc>
                 <a:spcPct val="115000"/>
               </a:lnSpc>
@@ -1311,9 +1072,11 @@
       <p:sp>
         <p:nvSpPr>
           <p:cNvPr id="3" name="Text Placeholder 2"/>
-          <p:cNvSpPr/>
+          <p:cNvSpPr>
+            <a:spLocks noGrp="1"/>
+          </p:cNvSpPr>
           <p:nvPr>
-            <p:ph idx="101" type="body"/>
+            <p:ph type="body" idx="101"/>
           </p:nvPr>
         </p:nvSpPr>
         <p:spPr>
@@ -1330,7 +1093,7 @@
         <p:txBody>
           <a:bodyPr wrap="square" lIns="0" tIns="0" rIns="0" bIns="0" rtlCol="0" anchor="t"/>
           <a:lstStyle>
-            <a:lvl1pPr algn="l" indent="0" marL="0">
+            <a:lvl1pPr marL="0" indent="0" algn="l">
               <a:lnSpc>
                 <a:spcPct val="140000"/>
               </a:lnSpc>
@@ -1346,7 +1109,7 @@
             </a:lvl1pPr>
           </a:lstStyle>
           <a:p>
-            <a:pPr algn="l" indent="0" marL="0">
+            <a:pPr marL="0" indent="0" algn="l">
               <a:lnSpc>
                 <a:spcPct val="140000"/>
               </a:lnSpc>
@@ -1625,6 +1388,7 @@
         <a:solidFill>
           <a:srgbClr val="14181F"/>
         </a:solidFill>
+        <a:effectLst/>
       </p:bgPr>
     </p:bg>
     <p:spTree>
@@ -1664,7 +1428,7 @@
           </a:bodyPr>
           <a:lstStyle/>
           <a:p>
-            <a:pPr algn="l" indent="0" marL="0">
+            <a:pPr marL="0" indent="0" algn="l">
               <a:lnSpc>
                 <a:spcPts val="2240"/>
               </a:lnSpc>
@@ -1688,7 +1452,9 @@
       <p:sp>
         <p:nvSpPr>
           <p:cNvPr id="3" name="Text 1"/>
-          <p:cNvSpPr/>
+          <p:cNvSpPr>
+            <a:spLocks noGrp="1"/>
+          </p:cNvSpPr>
           <p:nvPr>
             <p:ph type="title"/>
           </p:nvPr>
@@ -1710,7 +1476,7 @@
           </a:bodyPr>
           <a:lstStyle/>
           <a:p>
-            <a:pPr algn="l" indent="0" marL="0">
+            <a:pPr marL="0" indent="0" algn="l">
               <a:lnSpc>
                 <a:spcPts val="7560"/>
               </a:lnSpc>
@@ -1754,7 +1520,7 @@
           </a:bodyPr>
           <a:lstStyle/>
           <a:p>
-            <a:pPr algn="l" indent="0" marL="0">
+            <a:pPr marL="0" indent="0" algn="l">
               <a:lnSpc>
                 <a:spcPts val="2860"/>
               </a:lnSpc>
@@ -1798,7 +1564,7 @@
           </a:bodyPr>
           <a:lstStyle/>
           <a:p>
-            <a:pPr algn="l" indent="0" marL="0">
+            <a:pPr marL="0" indent="0" algn="l">
               <a:lnSpc>
                 <a:spcPts val="2240"/>
               </a:lnSpc>
@@ -1835,6 +1601,7 @@
         <a:solidFill>
           <a:srgbClr val="E8833A"/>
         </a:solidFill>
+        <a:effectLst/>
       </p:bgPr>
     </p:bg>
     <p:spTree>
@@ -1854,7 +1621,9 @@
       <p:sp>
         <p:nvSpPr>
           <p:cNvPr id="2" name="Text 0"/>
-          <p:cNvSpPr/>
+          <p:cNvSpPr>
+            <a:spLocks noGrp="1"/>
+          </p:cNvSpPr>
           <p:nvPr>
             <p:ph type="title"/>
           </p:nvPr>
@@ -1876,7 +1645,7 @@
           </a:bodyPr>
           <a:lstStyle/>
           <a:p>
-            <a:pPr algn="l" indent="0" marL="0">
+            <a:pPr marL="0" indent="0" algn="l">
               <a:lnSpc>
                 <a:spcPts val="2760"/>
               </a:lnSpc>
@@ -1920,7 +1689,7 @@
           </a:bodyPr>
           <a:lstStyle/>
           <a:p>
-            <a:pPr algn="l" indent="0" marL="0">
+            <a:pPr marL="0" indent="0" algn="l">
               <a:lnSpc>
                 <a:spcPts val="3454"/>
               </a:lnSpc>
@@ -2052,7 +1821,7 @@
           </a:bodyPr>
           <a:lstStyle/>
           <a:p>
-            <a:pPr algn="l" indent="0" marL="0">
+            <a:pPr marL="0" indent="0" algn="l">
               <a:lnSpc>
                 <a:spcPts val="2025"/>
               </a:lnSpc>
@@ -2072,7 +1841,7 @@
             <a:endParaRPr lang="en-US" sz="1500" dirty="0"/>
           </a:p>
           <a:p>
-            <a:pPr algn="l" indent="0" marL="0">
+            <a:pPr marL="0" indent="0" algn="l">
               <a:lnSpc>
                 <a:spcPts val="2025"/>
               </a:lnSpc>
@@ -2095,15 +1864,15 @@
       </p:sp>
       <p:pic>
         <p:nvPicPr>
-          <p:cNvPr id="5" name="Image 0" descr="image.png">    </p:cNvPr>
+          <p:cNvPr id="5" name="Image 0" descr="image.png"/>
           <p:cNvPicPr>
             <a:picLocks noChangeAspect="1"/>
           </p:cNvPicPr>
           <p:nvPr/>
         </p:nvPicPr>
         <p:blipFill>
-          <a:blip r:embed="rId1"/>
-          <a:srcRect l="10467" r="9686" t="9076" b="42349"/>
+          <a:blip r:embed="rId3"/>
+          <a:srcRect l="10467" t="9076" r="9686" b="42349"/>
           <a:stretch/>
         </p:blipFill>
         <p:spPr>
@@ -2132,6 +1901,7 @@
         <a:solidFill>
           <a:srgbClr val="F4F1EA"/>
         </a:solidFill>
+        <a:effectLst/>
       </p:bgPr>
     </p:bg>
     <p:spTree>
@@ -2151,7 +1921,9 @@
       <p:sp>
         <p:nvSpPr>
           <p:cNvPr id="2" name="Text 0"/>
-          <p:cNvSpPr/>
+          <p:cNvSpPr>
+            <a:spLocks noGrp="1"/>
+          </p:cNvSpPr>
           <p:nvPr>
             <p:ph type="title"/>
           </p:nvPr>
@@ -2173,7 +1945,7 @@
           </a:bodyPr>
           <a:lstStyle/>
           <a:p>
-            <a:pPr algn="l" indent="0" marL="0">
+            <a:pPr marL="0" indent="0" algn="l">
               <a:lnSpc>
                 <a:spcPts val="4140"/>
               </a:lnSpc>
@@ -2220,6 +1992,13 @@
             <a:prstDash val="solid"/>
           </a:ln>
         </p:spPr>
+        <p:txBody>
+          <a:bodyPr/>
+          <a:lstStyle/>
+          <a:p>
+            <a:endParaRPr lang="en-US"/>
+          </a:p>
+        </p:txBody>
       </p:sp>
       <p:sp>
         <p:nvSpPr>
@@ -2244,7 +2023,7 @@
           </a:bodyPr>
           <a:lstStyle/>
           <a:p>
-            <a:pPr algn="l" indent="0" marL="0">
+            <a:pPr marL="0" indent="0" algn="l">
               <a:lnSpc>
                 <a:spcPts val="2100"/>
               </a:lnSpc>
@@ -2288,7 +2067,7 @@
           </a:bodyPr>
           <a:lstStyle/>
           <a:p>
-            <a:pPr algn="l" indent="0" marL="0">
+            <a:pPr marL="0" indent="0" algn="l">
               <a:lnSpc>
                 <a:spcPts val="2100"/>
               </a:lnSpc>
@@ -2332,7 +2111,7 @@
           </a:bodyPr>
           <a:lstStyle/>
           <a:p>
-            <a:pPr algn="l" indent="0" marL="0">
+            <a:pPr marL="0" indent="0" algn="l">
               <a:lnSpc>
                 <a:spcPts val="1820"/>
               </a:lnSpc>
@@ -2378,19 +2157,19 @@
                 <a:lnTo>
                   <a:pt x="1209675" y="0"/>
                 </a:lnTo>
-                <a:arcTo hR="41275" wR="41275" stAng="16200000" swAng="5400000"/>
+                <a:arcTo wR="41275" hR="41275" stAng="16200000" swAng="5400000"/>
                 <a:lnTo>
                   <a:pt x="1250950" y="285105"/>
                 </a:lnTo>
-                <a:arcTo hR="41275" wR="41275" stAng="0" swAng="5400000"/>
+                <a:arcTo wR="41275" hR="41275" stAng="0" swAng="5400000"/>
                 <a:lnTo>
                   <a:pt x="41275" y="326380"/>
                 </a:lnTo>
-                <a:arcTo hR="41275" wR="41275" stAng="5400000" swAng="5400000"/>
+                <a:arcTo wR="41275" hR="41275" stAng="5400000" swAng="5400000"/>
                 <a:lnTo>
                   <a:pt x="0" y="41275"/>
                 </a:lnTo>
-                <a:arcTo hR="41275" wR="41275" stAng="10800000" swAng="5400000"/>
+                <a:arcTo wR="41275" hR="41275" stAng="10800000" swAng="5400000"/>
                 <a:close/>
               </a:path>
             </a:pathLst>
@@ -2409,7 +2188,7 @@
           </a:bodyPr>
           <a:lstStyle/>
           <a:p>
-            <a:pPr algn="ctr" indent="0" marL="0">
+            <a:pPr marL="0" indent="0" algn="ctr">
               <a:lnSpc>
                 <a:spcPts val="1820"/>
               </a:lnSpc>
@@ -2456,6 +2235,13 @@
             <a:prstDash val="solid"/>
           </a:ln>
         </p:spPr>
+        <p:txBody>
+          <a:bodyPr/>
+          <a:lstStyle/>
+          <a:p>
+            <a:endParaRPr lang="en-US"/>
+          </a:p>
+        </p:txBody>
       </p:sp>
       <p:sp>
         <p:nvSpPr>
@@ -2480,7 +2266,7 @@
           </a:bodyPr>
           <a:lstStyle/>
           <a:p>
-            <a:pPr algn="l" indent="0" marL="0">
+            <a:pPr marL="0" indent="0" algn="l">
               <a:lnSpc>
                 <a:spcPts val="2100"/>
               </a:lnSpc>
@@ -2524,7 +2310,7 @@
           </a:bodyPr>
           <a:lstStyle/>
           <a:p>
-            <a:pPr algn="l" indent="0" marL="0">
+            <a:pPr marL="0" indent="0" algn="l">
               <a:lnSpc>
                 <a:spcPts val="2100"/>
               </a:lnSpc>
@@ -2568,7 +2354,7 @@
           </a:bodyPr>
           <a:lstStyle/>
           <a:p>
-            <a:pPr algn="l" indent="0" marL="0">
+            <a:pPr marL="0" indent="0" algn="l">
               <a:lnSpc>
                 <a:spcPts val="1820"/>
               </a:lnSpc>
@@ -2619,7 +2405,7 @@
           </a:bodyPr>
           <a:lstStyle/>
           <a:p>
-            <a:pPr algn="ctr" indent="0" marL="0">
+            <a:pPr marL="0" indent="0" algn="ctr">
               <a:lnSpc>
                 <a:spcPts val="1820"/>
               </a:lnSpc>
@@ -2666,6 +2452,13 @@
             <a:prstDash val="solid"/>
           </a:ln>
         </p:spPr>
+        <p:txBody>
+          <a:bodyPr/>
+          <a:lstStyle/>
+          <a:p>
+            <a:endParaRPr lang="en-US"/>
+          </a:p>
+        </p:txBody>
       </p:sp>
       <p:sp>
         <p:nvSpPr>
@@ -2690,7 +2483,7 @@
           </a:bodyPr>
           <a:lstStyle/>
           <a:p>
-            <a:pPr algn="l" indent="0" marL="0">
+            <a:pPr marL="0" indent="0" algn="l">
               <a:lnSpc>
                 <a:spcPts val="2100"/>
               </a:lnSpc>
@@ -2734,7 +2527,7 @@
           </a:bodyPr>
           <a:lstStyle/>
           <a:p>
-            <a:pPr algn="l" indent="0" marL="0">
+            <a:pPr marL="0" indent="0" algn="l">
               <a:lnSpc>
                 <a:spcPts val="2100"/>
               </a:lnSpc>
@@ -2778,7 +2571,7 @@
           </a:bodyPr>
           <a:lstStyle/>
           <a:p>
-            <a:pPr algn="l" indent="0" marL="0">
+            <a:pPr marL="0" indent="0" algn="l">
               <a:lnSpc>
                 <a:spcPts val="1820"/>
               </a:lnSpc>
@@ -2829,7 +2622,7 @@
           </a:bodyPr>
           <a:lstStyle/>
           <a:p>
-            <a:pPr algn="ctr" indent="0" marL="0">
+            <a:pPr marL="0" indent="0" algn="ctr">
               <a:lnSpc>
                 <a:spcPts val="1820"/>
               </a:lnSpc>
@@ -2876,6 +2669,13 @@
             <a:prstDash val="solid"/>
           </a:ln>
         </p:spPr>
+        <p:txBody>
+          <a:bodyPr/>
+          <a:lstStyle/>
+          <a:p>
+            <a:endParaRPr lang="en-US"/>
+          </a:p>
+        </p:txBody>
       </p:sp>
       <p:sp>
         <p:nvSpPr>
@@ -2900,7 +2700,7 @@
           </a:bodyPr>
           <a:lstStyle/>
           <a:p>
-            <a:pPr algn="l" indent="0" marL="0">
+            <a:pPr marL="0" indent="0" algn="l">
               <a:lnSpc>
                 <a:spcPts val="2100"/>
               </a:lnSpc>
@@ -2944,7 +2744,7 @@
           </a:bodyPr>
           <a:lstStyle/>
           <a:p>
-            <a:pPr algn="l" indent="0" marL="0">
+            <a:pPr marL="0" indent="0" algn="l">
               <a:lnSpc>
                 <a:spcPts val="2100"/>
               </a:lnSpc>
@@ -2988,7 +2788,7 @@
           </a:bodyPr>
           <a:lstStyle/>
           <a:p>
-            <a:pPr algn="l" indent="0" marL="0">
+            <a:pPr marL="0" indent="0" algn="l">
               <a:lnSpc>
                 <a:spcPts val="1820"/>
               </a:lnSpc>
@@ -3039,7 +2839,7 @@
           </a:bodyPr>
           <a:lstStyle/>
           <a:p>
-            <a:pPr algn="ctr" indent="0" marL="0">
+            <a:pPr marL="0" indent="0" algn="ctr">
               <a:lnSpc>
                 <a:spcPts val="1820"/>
               </a:lnSpc>
@@ -3086,6 +2886,13 @@
             <a:prstDash val="solid"/>
           </a:ln>
         </p:spPr>
+        <p:txBody>
+          <a:bodyPr/>
+          <a:lstStyle/>
+          <a:p>
+            <a:endParaRPr lang="en-US"/>
+          </a:p>
+        </p:txBody>
       </p:sp>
       <p:sp>
         <p:nvSpPr>
@@ -3110,7 +2917,7 @@
           </a:bodyPr>
           <a:lstStyle/>
           <a:p>
-            <a:pPr algn="l" indent="0" marL="0">
+            <a:pPr marL="0" indent="0" algn="l">
               <a:lnSpc>
                 <a:spcPts val="2100"/>
               </a:lnSpc>
@@ -3154,7 +2961,7 @@
           </a:bodyPr>
           <a:lstStyle/>
           <a:p>
-            <a:pPr algn="l" indent="0" marL="0">
+            <a:pPr marL="0" indent="0" algn="l">
               <a:lnSpc>
                 <a:spcPts val="2100"/>
               </a:lnSpc>
@@ -3198,7 +3005,7 @@
           </a:bodyPr>
           <a:lstStyle/>
           <a:p>
-            <a:pPr algn="l" indent="0" marL="0">
+            <a:pPr marL="0" indent="0" algn="l">
               <a:lnSpc>
                 <a:spcPts val="1820"/>
               </a:lnSpc>
@@ -3249,7 +3056,7 @@
           </a:bodyPr>
           <a:lstStyle/>
           <a:p>
-            <a:pPr algn="ctr" indent="0" marL="0">
+            <a:pPr marL="0" indent="0" algn="ctr">
               <a:lnSpc>
                 <a:spcPts val="1820"/>
               </a:lnSpc>
@@ -3296,6 +3103,13 @@
             <a:prstDash val="solid"/>
           </a:ln>
         </p:spPr>
+        <p:txBody>
+          <a:bodyPr/>
+          <a:lstStyle/>
+          <a:p>
+            <a:endParaRPr lang="en-US"/>
+          </a:p>
+        </p:txBody>
       </p:sp>
       <p:sp>
         <p:nvSpPr>
@@ -3320,7 +3134,7 @@
           </a:bodyPr>
           <a:lstStyle/>
           <a:p>
-            <a:pPr algn="l" indent="0" marL="0">
+            <a:pPr marL="0" indent="0" algn="l">
               <a:lnSpc>
                 <a:spcPts val="2100"/>
               </a:lnSpc>
@@ -3364,7 +3178,7 @@
           </a:bodyPr>
           <a:lstStyle/>
           <a:p>
-            <a:pPr algn="l" indent="0" marL="0">
+            <a:pPr marL="0" indent="0" algn="l">
               <a:lnSpc>
                 <a:spcPts val="2100"/>
               </a:lnSpc>
@@ -3408,7 +3222,7 @@
           </a:bodyPr>
           <a:lstStyle/>
           <a:p>
-            <a:pPr algn="l" indent="0" marL="0">
+            <a:pPr marL="0" indent="0" algn="l">
               <a:lnSpc>
                 <a:spcPts val="1820"/>
               </a:lnSpc>
@@ -3456,7 +3270,7 @@
           </a:bodyPr>
           <a:lstStyle/>
           <a:p>
-            <a:pPr algn="ctr" indent="0" marL="0">
+            <a:pPr marL="0" indent="0" algn="ctr">
               <a:lnSpc>
                 <a:spcPts val="1820"/>
               </a:lnSpc>
@@ -3503,6 +3317,13 @@
             <a:prstDash val="solid"/>
           </a:ln>
         </p:spPr>
+        <p:txBody>
+          <a:bodyPr/>
+          <a:lstStyle/>
+          <a:p>
+            <a:endParaRPr lang="en-US"/>
+          </a:p>
+        </p:txBody>
       </p:sp>
       <p:sp>
         <p:nvSpPr>
@@ -3527,7 +3348,7 @@
           </a:bodyPr>
           <a:lstStyle/>
           <a:p>
-            <a:pPr algn="l" indent="0" marL="0">
+            <a:pPr marL="0" indent="0" algn="l">
               <a:lnSpc>
                 <a:spcPts val="2100"/>
               </a:lnSpc>
@@ -3571,7 +3392,7 @@
           </a:bodyPr>
           <a:lstStyle/>
           <a:p>
-            <a:pPr algn="l" indent="0" marL="0">
+            <a:pPr marL="0" indent="0" algn="l">
               <a:lnSpc>
                 <a:spcPts val="2100"/>
               </a:lnSpc>
@@ -3615,7 +3436,7 @@
           </a:bodyPr>
           <a:lstStyle/>
           <a:p>
-            <a:pPr algn="l" indent="0" marL="0">
+            <a:pPr marL="0" indent="0" algn="l">
               <a:lnSpc>
                 <a:spcPts val="1820"/>
               </a:lnSpc>
@@ -3666,7 +3487,7 @@
           </a:bodyPr>
           <a:lstStyle/>
           <a:p>
-            <a:pPr algn="ctr" indent="0" marL="0">
+            <a:pPr marL="0" indent="0" algn="ctr">
               <a:lnSpc>
                 <a:spcPts val="1820"/>
               </a:lnSpc>
@@ -3710,7 +3531,7 @@
           </a:bodyPr>
           <a:lstStyle/>
           <a:p>
-            <a:pPr algn="l" indent="0" marL="0">
+            <a:pPr marL="0" indent="0" algn="l">
               <a:lnSpc>
                 <a:spcPts val="1960"/>
               </a:lnSpc>
@@ -3747,6 +3568,7 @@
         <a:solidFill>
           <a:srgbClr val="F4F1EA"/>
         </a:solidFill>
+        <a:effectLst/>
       </p:bgPr>
     </p:bg>
     <p:spTree>
@@ -3766,7 +3588,9 @@
       <p:sp>
         <p:nvSpPr>
           <p:cNvPr id="2" name="Text 0"/>
-          <p:cNvSpPr/>
+          <p:cNvSpPr>
+            <a:spLocks noGrp="1"/>
+          </p:cNvSpPr>
           <p:nvPr>
             <p:ph type="title"/>
           </p:nvPr>
@@ -3788,7 +3612,7 @@
           </a:bodyPr>
           <a:lstStyle/>
           <a:p>
-            <a:pPr algn="l" indent="0" marL="0">
+            <a:pPr marL="0" indent="0" algn="l">
               <a:lnSpc>
                 <a:spcPts val="4140"/>
               </a:lnSpc>
@@ -3832,8 +3656,20 @@
             <a:tbl>
               <a:tblPr/>
               <a:tblGrid>
-                <a:gridCol w="5276850"/>
-                <a:gridCol w="5276850"/>
+                <a:gridCol w="5276850">
+                  <a:extLst>
+                    <a:ext uri="{9D8B030D-6E8A-4147-A177-3AD203B41FA5}">
+                      <a16:colId xmlns:a16="http://schemas.microsoft.com/office/drawing/2014/main" val="20000"/>
+                    </a:ext>
+                  </a:extLst>
+                </a:gridCol>
+                <a:gridCol w="5276850">
+                  <a:extLst>
+                    <a:ext uri="{9D8B030D-6E8A-4147-A177-3AD203B41FA5}">
+                      <a16:colId xmlns:a16="http://schemas.microsoft.com/office/drawing/2014/main" val="20001"/>
+                    </a:ext>
+                  </a:extLst>
+                </a:gridCol>
               </a:tblGrid>
               <a:tr h="412750">
                 <a:tc>
@@ -3841,7 +3677,7 @@
                     <a:bodyPr/>
                     <a:lstStyle/>
                     <a:p>
-                      <a:pPr indent="0" marL="0">
+                      <a:pPr marL="0" indent="0">
                         <a:lnSpc>
                           <a:spcPts val="2100"/>
                         </a:lnSpc>
@@ -3865,7 +3701,7 @@
                       </a:endParaRPr>
                     </a:p>
                   </a:txBody>
-                  <a:tcPr marL="66675" marR="66675" marT="66675" marB="66675" anchor="t">
+                  <a:tcPr marL="66675" marR="66675" marT="66675" marB="66675">
                     <a:lnL w="12700" cap="flat" cmpd="sng" algn="ctr">
                       <a:solidFill>
                         <a:srgbClr val="C3C0BB"/>
@@ -3912,7 +3748,7 @@
                     <a:bodyPr/>
                     <a:lstStyle/>
                     <a:p>
-                      <a:pPr indent="0" marL="0">
+                      <a:pPr marL="0" indent="0">
                         <a:lnSpc>
                           <a:spcPts val="2100"/>
                         </a:lnSpc>
@@ -3936,7 +3772,7 @@
                       </a:endParaRPr>
                     </a:p>
                   </a:txBody>
-                  <a:tcPr marL="66675" marR="66675" marT="66675" marB="66675" anchor="t">
+                  <a:tcPr marL="66675" marR="66675" marT="66675" marB="66675">
                     <a:lnL w="12700" cap="flat" cmpd="sng" algn="ctr">
                       <a:solidFill>
                         <a:srgbClr val="B5B2AD"/>
@@ -3978,6 +3814,11 @@
                     </a:solidFill>
                   </a:tcPr>
                 </a:tc>
+                <a:extLst>
+                  <a:ext uri="{0D108BD9-81ED-4DB2-BD59-A6C34878D82A}">
+                    <a16:rowId xmlns:a16="http://schemas.microsoft.com/office/drawing/2014/main" val="10000"/>
+                  </a:ext>
+                </a:extLst>
               </a:tr>
               <a:tr h="679450">
                 <a:tc>
@@ -3985,7 +3826,7 @@
                     <a:bodyPr/>
                     <a:lstStyle/>
                     <a:p>
-                      <a:pPr indent="0" marL="0">
+                      <a:pPr marL="0" indent="0">
                         <a:lnSpc>
                           <a:spcPts val="2100"/>
                         </a:lnSpc>
@@ -4009,7 +3850,7 @@
                       </a:endParaRPr>
                     </a:p>
                   </a:txBody>
-                  <a:tcPr marL="66675" marR="66675" marT="66675" marB="66675" anchor="t">
+                  <a:tcPr marL="66675" marR="66675" marT="66675" marB="66675">
                     <a:lnL w="12700" cap="flat" cmpd="sng" algn="ctr">
                       <a:solidFill>
                         <a:srgbClr val="C3C0BB"/>
@@ -4053,7 +3894,7 @@
                     <a:bodyPr/>
                     <a:lstStyle/>
                     <a:p>
-                      <a:pPr indent="0" marL="0">
+                      <a:pPr marL="0" indent="0">
                         <a:lnSpc>
                           <a:spcPts val="2100"/>
                         </a:lnSpc>
@@ -4077,7 +3918,7 @@
                       </a:endParaRPr>
                     </a:p>
                   </a:txBody>
-                  <a:tcPr marL="66675" marR="66675" marT="66675" marB="66675" anchor="t">
+                  <a:tcPr marL="66675" marR="66675" marT="66675" marB="66675">
                     <a:lnL w="12700" cap="flat" cmpd="sng" algn="ctr">
                       <a:solidFill>
                         <a:srgbClr val="C3C0BB"/>
@@ -4116,6 +3957,11 @@
                     </a:lnB>
                   </a:tcPr>
                 </a:tc>
+                <a:extLst>
+                  <a:ext uri="{0D108BD9-81ED-4DB2-BD59-A6C34878D82A}">
+                    <a16:rowId xmlns:a16="http://schemas.microsoft.com/office/drawing/2014/main" val="10001"/>
+                  </a:ext>
+                </a:extLst>
               </a:tr>
               <a:tr h="412750">
                 <a:tc>
@@ -4123,7 +3969,7 @@
                     <a:bodyPr/>
                     <a:lstStyle/>
                     <a:p>
-                      <a:pPr indent="0" marL="0">
+                      <a:pPr marL="0" indent="0">
                         <a:lnSpc>
                           <a:spcPts val="2100"/>
                         </a:lnSpc>
@@ -4147,7 +3993,7 @@
                       </a:endParaRPr>
                     </a:p>
                   </a:txBody>
-                  <a:tcPr marL="66675" marR="66675" marT="66675" marB="66675" anchor="t">
+                  <a:tcPr marL="66675" marR="66675" marT="66675" marB="66675">
                     <a:lnL w="12700" cap="flat" cmpd="sng" algn="ctr">
                       <a:solidFill>
                         <a:srgbClr val="C3C0BB"/>
@@ -4191,7 +4037,7 @@
                     <a:bodyPr/>
                     <a:lstStyle/>
                     <a:p>
-                      <a:pPr indent="0" marL="0">
+                      <a:pPr marL="0" indent="0">
                         <a:lnSpc>
                           <a:spcPts val="2100"/>
                         </a:lnSpc>
@@ -4215,7 +4061,7 @@
                       </a:endParaRPr>
                     </a:p>
                   </a:txBody>
-                  <a:tcPr marL="66675" marR="66675" marT="66675" marB="66675" anchor="t">
+                  <a:tcPr marL="66675" marR="66675" marT="66675" marB="66675">
                     <a:lnL w="12700" cap="flat" cmpd="sng" algn="ctr">
                       <a:solidFill>
                         <a:srgbClr val="C3C0BB"/>
@@ -4254,6 +4100,11 @@
                     </a:lnB>
                   </a:tcPr>
                 </a:tc>
+                <a:extLst>
+                  <a:ext uri="{0D108BD9-81ED-4DB2-BD59-A6C34878D82A}">
+                    <a16:rowId xmlns:a16="http://schemas.microsoft.com/office/drawing/2014/main" val="10002"/>
+                  </a:ext>
+                </a:extLst>
               </a:tr>
               <a:tr h="412750">
                 <a:tc>
@@ -4261,7 +4112,7 @@
                     <a:bodyPr/>
                     <a:lstStyle/>
                     <a:p>
-                      <a:pPr indent="0" marL="0">
+                      <a:pPr marL="0" indent="0">
                         <a:lnSpc>
                           <a:spcPts val="2100"/>
                         </a:lnSpc>
@@ -4285,7 +4136,7 @@
                       </a:endParaRPr>
                     </a:p>
                   </a:txBody>
-                  <a:tcPr marL="66675" marR="66675" marT="66675" marB="66675" anchor="t">
+                  <a:tcPr marL="66675" marR="66675" marT="66675" marB="66675">
                     <a:lnL w="12700" cap="flat" cmpd="sng" algn="ctr">
                       <a:solidFill>
                         <a:srgbClr val="C3C0BB"/>
@@ -4329,7 +4180,7 @@
                     <a:bodyPr/>
                     <a:lstStyle/>
                     <a:p>
-                      <a:pPr indent="0" marL="0">
+                      <a:pPr marL="0" indent="0">
                         <a:lnSpc>
                           <a:spcPts val="2100"/>
                         </a:lnSpc>
@@ -4353,7 +4204,7 @@
                       </a:endParaRPr>
                     </a:p>
                   </a:txBody>
-                  <a:tcPr marL="66675" marR="66675" marT="66675" marB="66675" anchor="t">
+                  <a:tcPr marL="66675" marR="66675" marT="66675" marB="66675">
                     <a:lnL w="12700" cap="flat" cmpd="sng" algn="ctr">
                       <a:solidFill>
                         <a:srgbClr val="C3C0BB"/>
@@ -4392,6 +4243,11 @@
                     </a:lnB>
                   </a:tcPr>
                 </a:tc>
+                <a:extLst>
+                  <a:ext uri="{0D108BD9-81ED-4DB2-BD59-A6C34878D82A}">
+                    <a16:rowId xmlns:a16="http://schemas.microsoft.com/office/drawing/2014/main" val="10003"/>
+                  </a:ext>
+                </a:extLst>
               </a:tr>
               <a:tr h="412750">
                 <a:tc>
@@ -4399,7 +4255,7 @@
                     <a:bodyPr/>
                     <a:lstStyle/>
                     <a:p>
-                      <a:pPr indent="0" marL="0">
+                      <a:pPr marL="0" indent="0">
                         <a:lnSpc>
                           <a:spcPts val="2100"/>
                         </a:lnSpc>
@@ -4423,7 +4279,7 @@
                       </a:endParaRPr>
                     </a:p>
                   </a:txBody>
-                  <a:tcPr marL="66675" marR="66675" marT="66675" marB="66675" anchor="t">
+                  <a:tcPr marL="66675" marR="66675" marT="66675" marB="66675">
                     <a:lnL w="12700" cap="flat" cmpd="sng" algn="ctr">
                       <a:solidFill>
                         <a:srgbClr val="C3C0BB"/>
@@ -4467,7 +4323,7 @@
                     <a:bodyPr/>
                     <a:lstStyle/>
                     <a:p>
-                      <a:pPr indent="0" marL="0">
+                      <a:pPr marL="0" indent="0">
                         <a:lnSpc>
                           <a:spcPts val="2100"/>
                         </a:lnSpc>
@@ -4491,7 +4347,7 @@
                       </a:endParaRPr>
                     </a:p>
                   </a:txBody>
-                  <a:tcPr marL="66675" marR="66675" marT="66675" marB="66675" anchor="t">
+                  <a:tcPr marL="66675" marR="66675" marT="66675" marB="66675">
                     <a:lnL w="12700" cap="flat" cmpd="sng" algn="ctr">
                       <a:solidFill>
                         <a:srgbClr val="C3C0BB"/>
@@ -4530,6 +4386,11 @@
                     </a:lnB>
                   </a:tcPr>
                 </a:tc>
+                <a:extLst>
+                  <a:ext uri="{0D108BD9-81ED-4DB2-BD59-A6C34878D82A}">
+                    <a16:rowId xmlns:a16="http://schemas.microsoft.com/office/drawing/2014/main" val="10004"/>
+                  </a:ext>
+                </a:extLst>
               </a:tr>
               <a:tr h="412750">
                 <a:tc>
@@ -4537,7 +4398,7 @@
                     <a:bodyPr/>
                     <a:lstStyle/>
                     <a:p>
-                      <a:pPr indent="0" marL="0">
+                      <a:pPr marL="0" indent="0">
                         <a:lnSpc>
                           <a:spcPts val="2100"/>
                         </a:lnSpc>
@@ -4561,7 +4422,7 @@
                       </a:endParaRPr>
                     </a:p>
                   </a:txBody>
-                  <a:tcPr marL="66675" marR="66675" marT="66675" marB="66675" anchor="t">
+                  <a:tcPr marL="66675" marR="66675" marT="66675" marB="66675">
                     <a:lnL w="12700" cap="flat" cmpd="sng" algn="ctr">
                       <a:solidFill>
                         <a:srgbClr val="C3C0BB"/>
@@ -4605,7 +4466,7 @@
                     <a:bodyPr/>
                     <a:lstStyle/>
                     <a:p>
-                      <a:pPr indent="0" marL="0">
+                      <a:pPr marL="0" indent="0">
                         <a:lnSpc>
                           <a:spcPts val="2100"/>
                         </a:lnSpc>
@@ -4629,7 +4490,7 @@
                       </a:endParaRPr>
                     </a:p>
                   </a:txBody>
-                  <a:tcPr marL="66675" marR="66675" marT="66675" marB="66675" anchor="t">
+                  <a:tcPr marL="66675" marR="66675" marT="66675" marB="66675">
                     <a:lnL w="12700" cap="flat" cmpd="sng" algn="ctr">
                       <a:solidFill>
                         <a:srgbClr val="C3C0BB"/>
@@ -4668,6 +4529,11 @@
                     </a:lnB>
                   </a:tcPr>
                 </a:tc>
+                <a:extLst>
+                  <a:ext uri="{0D108BD9-81ED-4DB2-BD59-A6C34878D82A}">
+                    <a16:rowId xmlns:a16="http://schemas.microsoft.com/office/drawing/2014/main" val="10005"/>
+                  </a:ext>
+                </a:extLst>
               </a:tr>
             </a:tbl>
           </a:graphicData>
@@ -4689,6 +4555,7 @@
         <a:solidFill>
           <a:srgbClr val="14181F"/>
         </a:solidFill>
+        <a:effectLst/>
       </p:bgPr>
     </p:bg>
     <p:spTree>
@@ -4708,7 +4575,9 @@
       <p:sp>
         <p:nvSpPr>
           <p:cNvPr id="2" name="Text 0"/>
-          <p:cNvSpPr/>
+          <p:cNvSpPr>
+            <a:spLocks noGrp="1"/>
+          </p:cNvSpPr>
           <p:nvPr>
             <p:ph type="title"/>
           </p:nvPr>
@@ -4730,7 +4599,7 @@
           </a:bodyPr>
           <a:lstStyle/>
           <a:p>
-            <a:pPr algn="l" indent="0" marL="0">
+            <a:pPr marL="0" indent="0" algn="l">
               <a:lnSpc>
                 <a:spcPts val="4140"/>
               </a:lnSpc>
@@ -4772,6 +4641,13 @@
           </a:solidFill>
           <a:ln/>
         </p:spPr>
+        <p:txBody>
+          <a:bodyPr/>
+          <a:lstStyle/>
+          <a:p>
+            <a:endParaRPr lang="en-US"/>
+          </a:p>
+        </p:txBody>
       </p:sp>
       <p:sp>
         <p:nvSpPr>
@@ -4796,7 +4672,7 @@
           </a:bodyPr>
           <a:lstStyle/>
           <a:p>
-            <a:pPr algn="l" indent="0" marL="0">
+            <a:pPr marL="0" indent="0" algn="l">
               <a:lnSpc>
                 <a:spcPts val="2160"/>
               </a:lnSpc>
@@ -4840,7 +4716,7 @@
           </a:bodyPr>
           <a:lstStyle/>
           <a:p>
-            <a:pPr algn="l" indent="0" marL="0">
+            <a:pPr marL="0" indent="0" algn="l">
               <a:lnSpc>
                 <a:spcPts val="1950"/>
               </a:lnSpc>
@@ -4882,6 +4758,13 @@
           </a:solidFill>
           <a:ln/>
         </p:spPr>
+        <p:txBody>
+          <a:bodyPr/>
+          <a:lstStyle/>
+          <a:p>
+            <a:endParaRPr lang="en-US"/>
+          </a:p>
+        </p:txBody>
       </p:sp>
       <p:sp>
         <p:nvSpPr>
@@ -4906,7 +4789,7 @@
           </a:bodyPr>
           <a:lstStyle/>
           <a:p>
-            <a:pPr algn="l" indent="0" marL="0">
+            <a:pPr marL="0" indent="0" algn="l">
               <a:lnSpc>
                 <a:spcPts val="2160"/>
               </a:lnSpc>
@@ -4950,7 +4833,7 @@
           </a:bodyPr>
           <a:lstStyle/>
           <a:p>
-            <a:pPr algn="l" indent="0" marL="0">
+            <a:pPr marL="0" indent="0" algn="l">
               <a:lnSpc>
                 <a:spcPts val="1950"/>
               </a:lnSpc>
@@ -4992,6 +4875,13 @@
           </a:solidFill>
           <a:ln/>
         </p:spPr>
+        <p:txBody>
+          <a:bodyPr/>
+          <a:lstStyle/>
+          <a:p>
+            <a:endParaRPr lang="en-US"/>
+          </a:p>
+        </p:txBody>
       </p:sp>
       <p:sp>
         <p:nvSpPr>
@@ -5016,7 +4906,7 @@
           </a:bodyPr>
           <a:lstStyle/>
           <a:p>
-            <a:pPr algn="l" indent="0" marL="0">
+            <a:pPr marL="0" indent="0" algn="l">
               <a:lnSpc>
                 <a:spcPts val="2160"/>
               </a:lnSpc>
@@ -5060,7 +4950,7 @@
           </a:bodyPr>
           <a:lstStyle/>
           <a:p>
-            <a:pPr algn="l" indent="0" marL="0">
+            <a:pPr marL="0" indent="0" algn="l">
               <a:lnSpc>
                 <a:spcPts val="1950"/>
               </a:lnSpc>
@@ -5078,6 +4968,244 @@
               <a:t>bit-accurate NumPy/Python simulation of the online running-max and running-sum recurrence equations.</a:t>
             </a:r>
             <a:endParaRPr lang="en-US" sz="1500" dirty="0"/>
+          </a:p>
+        </p:txBody>
+      </p:sp>
+      <p:sp>
+        <p:nvSpPr>
+          <p:cNvPr id="13" name="TextBox 12">
+            <a:extLst>
+              <a:ext uri="{FF2B5EF4-FFF2-40B4-BE49-F238E27FC236}">
+                <a16:creationId xmlns:a16="http://schemas.microsoft.com/office/drawing/2014/main" id="{5D39947C-C051-E677-7B57-D046BC8BF11C}"/>
+              </a:ext>
+            </a:extLst>
+          </p:cNvPr>
+          <p:cNvSpPr txBox="1"/>
+          <p:nvPr/>
+        </p:nvSpPr>
+        <p:spPr>
+          <a:xfrm>
+            <a:off x="722811" y="4208094"/>
+            <a:ext cx="6096000" cy="346249"/>
+          </a:xfrm>
+          <a:prstGeom prst="rect">
+            <a:avLst/>
+          </a:prstGeom>
+          <a:noFill/>
+        </p:spPr>
+        <p:txBody>
+          <a:bodyPr wrap="square">
+            <a:spAutoFit/>
+          </a:bodyPr>
+          <a:lstStyle/>
+          <a:p>
+            <a:r>
+              <a:rPr lang="en-US" sz="1800" b="1" i="0">
+                <a:solidFill>
+                  <a:schemeClr val="tx1"/>
+                </a:solidFill>
+                <a:effectLst/>
+                <a:latin typeface="+mn-lt"/>
+              </a:rPr>
+              <a:t>NumPy model vs. PyTorch Softmax</a:t>
+            </a:r>
+            <a:endParaRPr lang="en-US"/>
+          </a:p>
+        </p:txBody>
+      </p:sp>
+      <p:sp>
+        <p:nvSpPr>
+          <p:cNvPr id="14" name="Shape 1">
+            <a:extLst>
+              <a:ext uri="{FF2B5EF4-FFF2-40B4-BE49-F238E27FC236}">
+                <a16:creationId xmlns:a16="http://schemas.microsoft.com/office/drawing/2014/main" id="{935F180A-8B55-B4AC-5DE5-FD705DB3E142}"/>
+              </a:ext>
+            </a:extLst>
+          </p:cNvPr>
+          <p:cNvSpPr/>
+          <p:nvPr/>
+        </p:nvSpPr>
+        <p:spPr>
+          <a:xfrm>
+            <a:off x="812800" y="4749287"/>
+            <a:ext cx="2879634" cy="1573631"/>
+          </a:xfrm>
+          <a:prstGeom prst="roundRect">
+            <a:avLst>
+              <a:gd name="adj" fmla="val 4287"/>
+            </a:avLst>
+          </a:prstGeom>
+          <a:solidFill>
+            <a:schemeClr val="tx2"/>
+          </a:solidFill>
+          <a:ln/>
+        </p:spPr>
+        <p:txBody>
+          <a:bodyPr/>
+          <a:lstStyle/>
+          <a:p>
+            <a:r>
+              <a:rPr lang="en-US" sz="1400" b="1">
+                <a:solidFill>
+                  <a:schemeClr val="bg1"/>
+                </a:solidFill>
+              </a:rPr>
+              <a:t>SOFTMAX PROBABILITIES</a:t>
+            </a:r>
+          </a:p>
+          <a:p>
+            <a:r>
+              <a:rPr lang="en-US"/>
+              <a:t>0.00229 </a:t>
+            </a:r>
+          </a:p>
+          <a:p>
+            <a:r>
+              <a:rPr lang="en-US">
+                <a:solidFill>
+                  <a:schemeClr val="bg1"/>
+                </a:solidFill>
+              </a:rPr>
+              <a:t>MAX ABS ERROR · PASS</a:t>
+            </a:r>
+            <a:r>
+              <a:rPr lang="en-US"/>
+              <a:t> </a:t>
+            </a:r>
+            <a:r>
+              <a:rPr lang="en-US" sz="1200"/>
+              <a:t>allowed: 2% relative + 0.0002 absolute</a:t>
+            </a:r>
+          </a:p>
+        </p:txBody>
+      </p:sp>
+      <p:sp>
+        <p:nvSpPr>
+          <p:cNvPr id="18" name="Shape 1">
+            <a:extLst>
+              <a:ext uri="{FF2B5EF4-FFF2-40B4-BE49-F238E27FC236}">
+                <a16:creationId xmlns:a16="http://schemas.microsoft.com/office/drawing/2014/main" id="{906B14F6-6500-FEC4-D00C-ADA1031098B2}"/>
+              </a:ext>
+            </a:extLst>
+          </p:cNvPr>
+          <p:cNvSpPr/>
+          <p:nvPr/>
+        </p:nvSpPr>
+        <p:spPr>
+          <a:xfrm>
+            <a:off x="4057918" y="4749287"/>
+            <a:ext cx="2879634" cy="1573631"/>
+          </a:xfrm>
+          <a:prstGeom prst="roundRect">
+            <a:avLst>
+              <a:gd name="adj" fmla="val 4287"/>
+            </a:avLst>
+          </a:prstGeom>
+          <a:solidFill>
+            <a:schemeClr val="tx2"/>
+          </a:solidFill>
+          <a:ln/>
+        </p:spPr>
+        <p:txBody>
+          <a:bodyPr/>
+          <a:lstStyle/>
+          <a:p>
+            <a:r>
+              <a:rPr lang="en-US" sz="1400" b="1">
+                <a:solidFill>
+                  <a:schemeClr val="bg1"/>
+                </a:solidFill>
+              </a:rPr>
+              <a:t>STREAMING ATTENTION OUTPUTS</a:t>
+            </a:r>
+          </a:p>
+          <a:p>
+            <a:r>
+              <a:rPr lang="en-US"/>
+              <a:t>0.00116 </a:t>
+            </a:r>
+          </a:p>
+          <a:p>
+            <a:r>
+              <a:rPr lang="en-US">
+                <a:solidFill>
+                  <a:schemeClr val="bg1"/>
+                </a:solidFill>
+              </a:rPr>
+              <a:t>MAX ABS ERROR · PASS</a:t>
+            </a:r>
+            <a:r>
+              <a:rPr lang="en-US"/>
+              <a:t> </a:t>
+            </a:r>
+            <a:r>
+              <a:rPr lang="en-US" sz="1200"/>
+              <a:t>allowed: 2.5% relative + 0.002 absolute</a:t>
+            </a:r>
+          </a:p>
+        </p:txBody>
+      </p:sp>
+      <p:sp>
+        <p:nvSpPr>
+          <p:cNvPr id="19" name="Shape 1">
+            <a:extLst>
+              <a:ext uri="{FF2B5EF4-FFF2-40B4-BE49-F238E27FC236}">
+                <a16:creationId xmlns:a16="http://schemas.microsoft.com/office/drawing/2014/main" id="{977A2C20-46DC-3436-92AE-50D0BF757104}"/>
+              </a:ext>
+            </a:extLst>
+          </p:cNvPr>
+          <p:cNvSpPr/>
+          <p:nvPr/>
+        </p:nvSpPr>
+        <p:spPr>
+          <a:xfrm>
+            <a:off x="7303036" y="4749287"/>
+            <a:ext cx="2879634" cy="1573631"/>
+          </a:xfrm>
+          <a:prstGeom prst="roundRect">
+            <a:avLst>
+              <a:gd name="adj" fmla="val 4287"/>
+            </a:avLst>
+          </a:prstGeom>
+          <a:solidFill>
+            <a:schemeClr val="tx2"/>
+          </a:solidFill>
+          <a:ln/>
+        </p:spPr>
+        <p:txBody>
+          <a:bodyPr/>
+          <a:lstStyle/>
+          <a:p>
+            <a:r>
+              <a:rPr lang="en-US" sz="1400" b="1">
+                <a:solidFill>
+                  <a:schemeClr val="bg1"/>
+                </a:solidFill>
+              </a:rPr>
+              <a:t>STREAMING / STORAGE CHECK</a:t>
+            </a:r>
+          </a:p>
+          <a:p>
+            <a:r>
+              <a:rPr lang="en-US" sz="1400"/>
+              <a:t>NO N × N SCORE MATRIX</a:t>
+            </a:r>
+          </a:p>
+          <a:p>
+            <a:r>
+              <a:rPr lang="en-US" sz="1200" b="1">
+                <a:solidFill>
+                  <a:schemeClr val="bg1"/>
+                </a:solidFill>
+              </a:rPr>
+              <a:t>TILE SIZES 13 AND 64 → IDENTICAL OUTPUT</a:t>
+            </a:r>
+          </a:p>
+          <a:p>
+            <a:r>
+              <a:rPr lang="en-US" sz="1200"/>
+              <a:t>196 keys · 32-d query · 16-d output</a:t>
+            </a:r>
           </a:p>
         </p:txBody>
       </p:sp>
@@ -5097,6 +5225,7 @@
         <a:solidFill>
           <a:srgbClr val="F4F1EA"/>
         </a:solidFill>
+        <a:effectLst/>
       </p:bgPr>
     </p:bg>
     <p:spTree>
@@ -5116,7 +5245,9 @@
       <p:sp>
         <p:nvSpPr>
           <p:cNvPr id="2" name="Text 0"/>
-          <p:cNvSpPr/>
+          <p:cNvSpPr>
+            <a:spLocks noGrp="1"/>
+          </p:cNvSpPr>
           <p:nvPr>
             <p:ph type="title"/>
           </p:nvPr>
@@ -5138,7 +5269,7 @@
           </a:bodyPr>
           <a:lstStyle/>
           <a:p>
-            <a:pPr algn="l" indent="0" marL="0">
+            <a:pPr marL="0" indent="0" algn="l">
               <a:lnSpc>
                 <a:spcPts val="4140"/>
               </a:lnSpc>
@@ -5180,6 +5311,13 @@
           </a:solidFill>
           <a:ln/>
         </p:spPr>
+        <p:txBody>
+          <a:bodyPr/>
+          <a:lstStyle/>
+          <a:p>
+            <a:endParaRPr lang="en-US"/>
+          </a:p>
+        </p:txBody>
       </p:sp>
       <p:sp>
         <p:nvSpPr>
@@ -5204,7 +5342,7 @@
           </a:bodyPr>
           <a:lstStyle/>
           <a:p>
-            <a:pPr algn="l" indent="0" marL="0">
+            <a:pPr marL="0" indent="0" algn="l">
               <a:lnSpc>
                 <a:spcPts val="2160"/>
               </a:lnSpc>
@@ -5248,7 +5386,7 @@
           </a:bodyPr>
           <a:lstStyle/>
           <a:p>
-            <a:pPr algn="l" indent="0" marL="0">
+            <a:pPr marL="0" indent="0" algn="l">
               <a:lnSpc>
                 <a:spcPts val="2340"/>
               </a:lnSpc>
@@ -5290,6 +5428,13 @@
           </a:solidFill>
           <a:ln/>
         </p:spPr>
+        <p:txBody>
+          <a:bodyPr/>
+          <a:lstStyle/>
+          <a:p>
+            <a:endParaRPr lang="en-US"/>
+          </a:p>
+        </p:txBody>
       </p:sp>
       <p:sp>
         <p:nvSpPr>
@@ -5314,7 +5459,7 @@
           </a:bodyPr>
           <a:lstStyle/>
           <a:p>
-            <a:pPr algn="l" indent="0" marL="0">
+            <a:pPr marL="0" indent="0" algn="l">
               <a:lnSpc>
                 <a:spcPts val="2160"/>
               </a:lnSpc>
@@ -5358,7 +5503,7 @@
           </a:bodyPr>
           <a:lstStyle/>
           <a:p>
-            <a:pPr algn="l" indent="0" marL="0">
+            <a:pPr marL="0" indent="0" algn="l">
               <a:lnSpc>
                 <a:spcPts val="2025"/>
               </a:lnSpc>
@@ -5402,7 +5547,7 @@
           </a:bodyPr>
           <a:lstStyle/>
           <a:p>
-            <a:pPr algn="l" indent="0" marL="0">
+            <a:pPr marL="0" indent="0" algn="l">
               <a:lnSpc>
                 <a:spcPts val="2025"/>
               </a:lnSpc>
@@ -5420,6 +5565,53 @@
               <a:t>Fix: keep 8-bit activations (W4A8) and rely on 4-bit weight packing for the 50% bus reduction.</a:t>
             </a:r>
             <a:endParaRPr lang="en-US" sz="1500" dirty="0"/>
+          </a:p>
+        </p:txBody>
+      </p:sp>
+      <p:sp>
+        <p:nvSpPr>
+          <p:cNvPr id="10" name="Shape 7">
+            <a:extLst>
+              <a:ext uri="{FF2B5EF4-FFF2-40B4-BE49-F238E27FC236}">
+                <a16:creationId xmlns:a16="http://schemas.microsoft.com/office/drawing/2014/main" id="{DC51FFE4-2651-0E48-B18F-F37520BEEF36}"/>
+              </a:ext>
+            </a:extLst>
+          </p:cNvPr>
+          <p:cNvSpPr/>
+          <p:nvPr/>
+        </p:nvSpPr>
+        <p:spPr>
+          <a:xfrm>
+            <a:off x="812800" y="4462810"/>
+            <a:ext cx="10566400" cy="1582390"/>
+          </a:xfrm>
+          <a:prstGeom prst="roundRect">
+            <a:avLst>
+              <a:gd name="adj" fmla="val 6421"/>
+            </a:avLst>
+          </a:prstGeom>
+          <a:solidFill>
+            <a:srgbClr val="E8833A"/>
+          </a:solidFill>
+          <a:ln/>
+        </p:spPr>
+        <p:txBody>
+          <a:bodyPr/>
+          <a:lstStyle/>
+          <a:p>
+            <a:r>
+              <a:rPr lang="en-US" sz="1200"/>
+              <a:t>Created base2_softmax.py, implementing a Q15 exponential with a 64-entry fractional LUT, fixed-point score quantization, and the online max/sum recurrence. Its attention path processes key/value blocks and avoids materializing an N×N score matrix. Added usage and precision notes to README.md.</a:t>
+            </a:r>
+          </a:p>
+          <a:p>
+            <a:endParaRPr lang="en-US" sz="1200"/>
+          </a:p>
+          <a:p>
+            <a:r>
+              <a:rPr lang="en-US" sz="1200"/>
+              <a:t>Validation passed: python3 base2_softmax.py --self-test verified the LUT, recurrence, normalization, and PyTorch Softmax comparisons; python3 -m py_compile base2_softmax.py and git diff --check also passed. PyTorch parity is numerical within the test tolerances—not bit-identical to floating-point Softmax, because the LUT and fixed-point arithmetic are approximations.</a:t>
+            </a:r>
           </a:p>
         </p:txBody>
       </p:sp>
@@ -5439,6 +5631,7 @@
         <a:solidFill>
           <a:srgbClr val="14181F"/>
         </a:solidFill>
+        <a:effectLst/>
       </p:bgPr>
     </p:bg>
     <p:spTree>
@@ -5458,7 +5651,9 @@
       <p:sp>
         <p:nvSpPr>
           <p:cNvPr id="2" name="Text 0"/>
-          <p:cNvSpPr/>
+          <p:cNvSpPr>
+            <a:spLocks noGrp="1"/>
+          </p:cNvSpPr>
           <p:nvPr>
             <p:ph type="title"/>
           </p:nvPr>
@@ -5480,7 +5675,7 @@
           </a:bodyPr>
           <a:lstStyle/>
           <a:p>
-            <a:pPr algn="l" indent="0" marL="0">
+            <a:pPr marL="0" indent="0" algn="l">
               <a:lnSpc>
                 <a:spcPts val="4140"/>
               </a:lnSpc>
@@ -5522,6 +5717,13 @@
           </a:solidFill>
           <a:ln/>
         </p:spPr>
+        <p:txBody>
+          <a:bodyPr/>
+          <a:lstStyle/>
+          <a:p>
+            <a:endParaRPr lang="en-US"/>
+          </a:p>
+        </p:txBody>
       </p:sp>
       <p:sp>
         <p:nvSpPr>
@@ -5546,7 +5748,7 @@
           </a:bodyPr>
           <a:lstStyle/>
           <a:p>
-            <a:pPr algn="l" indent="0" marL="0">
+            <a:pPr marL="0" indent="0" algn="l">
               <a:lnSpc>
                 <a:spcPts val="2160"/>
               </a:lnSpc>
@@ -5590,7 +5792,7 @@
           </a:bodyPr>
           <a:lstStyle/>
           <a:p>
-            <a:pPr algn="l" indent="0" marL="0">
+            <a:pPr marL="0" indent="0" algn="l">
               <a:lnSpc>
                 <a:spcPts val="2025"/>
               </a:lnSpc>
@@ -5632,6 +5834,13 @@
           </a:solidFill>
           <a:ln/>
         </p:spPr>
+        <p:txBody>
+          <a:bodyPr/>
+          <a:lstStyle/>
+          <a:p>
+            <a:endParaRPr lang="en-US"/>
+          </a:p>
+        </p:txBody>
       </p:sp>
       <p:sp>
         <p:nvSpPr>
@@ -5656,7 +5865,7 @@
           </a:bodyPr>
           <a:lstStyle/>
           <a:p>
-            <a:pPr algn="l" indent="0" marL="0">
+            <a:pPr marL="0" indent="0" algn="l">
               <a:lnSpc>
                 <a:spcPts val="2160"/>
               </a:lnSpc>
@@ -5700,7 +5909,7 @@
           </a:bodyPr>
           <a:lstStyle/>
           <a:p>
-            <a:pPr algn="l" indent="0" marL="0">
+            <a:pPr marL="0" indent="0" algn="l">
               <a:lnSpc>
                 <a:spcPts val="2025"/>
               </a:lnSpc>
@@ -5742,6 +5951,13 @@
           </a:solidFill>
           <a:ln/>
         </p:spPr>
+        <p:txBody>
+          <a:bodyPr/>
+          <a:lstStyle/>
+          <a:p>
+            <a:endParaRPr lang="en-US"/>
+          </a:p>
+        </p:txBody>
       </p:sp>
       <p:sp>
         <p:nvSpPr>
@@ -5766,7 +5982,7 @@
           </a:bodyPr>
           <a:lstStyle/>
           <a:p>
-            <a:pPr algn="l" indent="0" marL="0">
+            <a:pPr marL="0" indent="0" algn="l">
               <a:lnSpc>
                 <a:spcPts val="2160"/>
               </a:lnSpc>
@@ -5810,7 +6026,7 @@
           </a:bodyPr>
           <a:lstStyle/>
           <a:p>
-            <a:pPr algn="l" marL="176530" indent="-176530">
+            <a:pPr marL="176530" indent="-176530" algn="l">
               <a:lnSpc>
                 <a:spcPts val="2100"/>
               </a:lnSpc>
@@ -5831,7 +6047,7 @@
             <a:endParaRPr lang="en-US" sz="1500" dirty="0"/>
           </a:p>
           <a:p>
-            <a:pPr algn="l" marL="176530" indent="-176530">
+            <a:pPr marL="176530" indent="-176530" algn="l">
               <a:lnSpc>
                 <a:spcPts val="2100"/>
               </a:lnSpc>
@@ -5852,7 +6068,7 @@
             <a:endParaRPr lang="en-US" sz="1500" dirty="0"/>
           </a:p>
           <a:p>
-            <a:pPr algn="l" marL="176530" indent="-176530">
+            <a:pPr marL="176530" indent="-176530" algn="l">
               <a:lnSpc>
                 <a:spcPts val="2100"/>
               </a:lnSpc>
@@ -6170,4 +6386,319 @@
   <a:objectDefaults/>
   <a:extraClrSchemeLst/>
 </a:theme>
+</file>
+
+<file path=ppt/theme/theme2.xml><?xml version="1.0" encoding="utf-8"?>
+<a:theme xmlns:a="http://schemas.openxmlformats.org/drawingml/2006/main" name="Office Theme">
+  <a:themeElements>
+    <a:clrScheme name="Office">
+      <a:dk1>
+        <a:sysClr val="windowText" lastClr="000000"/>
+      </a:dk1>
+      <a:lt1>
+        <a:sysClr val="window" lastClr="FFFFFF"/>
+      </a:lt1>
+      <a:dk2>
+        <a:srgbClr val="0E2841"/>
+      </a:dk2>
+      <a:lt2>
+        <a:srgbClr val="E8E8E8"/>
+      </a:lt2>
+      <a:accent1>
+        <a:srgbClr val="156082"/>
+      </a:accent1>
+      <a:accent2>
+        <a:srgbClr val="E97132"/>
+      </a:accent2>
+      <a:accent3>
+        <a:srgbClr val="196B24"/>
+      </a:accent3>
+      <a:accent4>
+        <a:srgbClr val="0F9ED5"/>
+      </a:accent4>
+      <a:accent5>
+        <a:srgbClr val="A02B93"/>
+      </a:accent5>
+      <a:accent6>
+        <a:srgbClr val="4EA72E"/>
+      </a:accent6>
+      <a:hlink>
+        <a:srgbClr val="467886"/>
+      </a:hlink>
+      <a:folHlink>
+        <a:srgbClr val="96607D"/>
+      </a:folHlink>
+    </a:clrScheme>
+    <a:fontScheme name="Office">
+      <a:majorFont>
+        <a:latin typeface="Aptos Display" panose="02110004020202020204"/>
+        <a:ea typeface=""/>
+        <a:cs typeface=""/>
+        <a:font script="Jpan" typeface="游ゴシック Light"/>
+        <a:font script="Hang" typeface="맑은 고딕"/>
+        <a:font script="Hans" typeface="等线 Light"/>
+        <a:font script="Hant" typeface="新細明體"/>
+        <a:font script="Arab" typeface="Times New Roman"/>
+        <a:font script="Hebr" typeface="Times New Roman"/>
+        <a:font script="Thai" typeface="Angsana New"/>
+        <a:font script="Ethi" typeface="Nyala"/>
+        <a:font script="Beng" typeface="Vrinda"/>
+        <a:font script="Gujr" typeface="Shruti"/>
+        <a:font script="Khmr" typeface="MoolBoran"/>
+        <a:font script="Knda" typeface="Tunga"/>
+        <a:font script="Guru" typeface="Raavi"/>
+        <a:font script="Cans" typeface="Euphemia"/>
+        <a:font script="Cher" typeface="Plantagenet Cherokee"/>
+        <a:font script="Yiii" typeface="Microsoft Yi Baiti"/>
+        <a:font script="Tibt" typeface="Microsoft Himalaya"/>
+        <a:font script="Thaa" typeface="MV Boli"/>
+        <a:font script="Deva" typeface="Mangal"/>
+        <a:font script="Telu" typeface="Gautami"/>
+        <a:font script="Taml" typeface="Latha"/>
+        <a:font script="Syrc" typeface="Estrangelo Edessa"/>
+        <a:font script="Orya" typeface="Kalinga"/>
+        <a:font script="Mlym" typeface="Kartika"/>
+        <a:font script="Laoo" typeface="DokChampa"/>
+        <a:font script="Sinh" typeface="Iskoola Pota"/>
+        <a:font script="Mong" typeface="Mongolian Baiti"/>
+        <a:font script="Viet" typeface="Times New Roman"/>
+        <a:font script="Uigh" typeface="Microsoft Uighur"/>
+        <a:font script="Geor" typeface="Sylfaen"/>
+        <a:font script="Armn" typeface="Arial"/>
+        <a:font script="Bugi" typeface="Leelawadee UI"/>
+        <a:font script="Bopo" typeface="Microsoft JhengHei"/>
+        <a:font script="Java" typeface="Javanese Text"/>
+        <a:font script="Lisu" typeface="Segoe UI"/>
+        <a:font script="Mymr" typeface="Myanmar Text"/>
+        <a:font script="Nkoo" typeface="Ebrima"/>
+        <a:font script="Olck" typeface="Nirmala UI"/>
+        <a:font script="Osma" typeface="Ebrima"/>
+        <a:font script="Phag" typeface="Phagspa"/>
+        <a:font script="Syrn" typeface="Estrangelo Edessa"/>
+        <a:font script="Syrj" typeface="Estrangelo Edessa"/>
+        <a:font script="Syre" typeface="Estrangelo Edessa"/>
+        <a:font script="Sora" typeface="Nirmala UI"/>
+        <a:font script="Tale" typeface="Microsoft Tai Le"/>
+        <a:font script="Talu" typeface="Microsoft New Tai Lue"/>
+        <a:font script="Tfng" typeface="Ebrima"/>
+      </a:majorFont>
+      <a:minorFont>
+        <a:latin typeface="Aptos" panose="02110004020202020204"/>
+        <a:ea typeface=""/>
+        <a:cs typeface=""/>
+        <a:font script="Jpan" typeface="游ゴシック"/>
+        <a:font script="Hang" typeface="맑은 고딕"/>
+        <a:font script="Hans" typeface="等线"/>
+        <a:font script="Hant" typeface="新細明體"/>
+        <a:font script="Arab" typeface="Arial"/>
+        <a:font script="Hebr" typeface="Arial"/>
+        <a:font script="Thai" typeface="Cordia New"/>
+        <a:font script="Ethi" typeface="Nyala"/>
+        <a:font script="Beng" typeface="Vrinda"/>
+        <a:font script="Gujr" typeface="Shruti"/>
+        <a:font script="Khmr" typeface="DaunPenh"/>
+        <a:font script="Knda" typeface="Tunga"/>
+        <a:font script="Guru" typeface="Raavi"/>
+        <a:font script="Cans" typeface="Euphemia"/>
+        <a:font script="Cher" typeface="Plantagenet Cherokee"/>
+        <a:font script="Yiii" typeface="Microsoft Yi Baiti"/>
+        <a:font script="Tibt" typeface="Microsoft Himalaya"/>
+        <a:font script="Thaa" typeface="MV Boli"/>
+        <a:font script="Deva" typeface="Mangal"/>
+        <a:font script="Telu" typeface="Gautami"/>
+        <a:font script="Taml" typeface="Latha"/>
+        <a:font script="Syrc" typeface="Estrangelo Edessa"/>
+        <a:font script="Orya" typeface="Kalinga"/>
+        <a:font script="Mlym" typeface="Kartika"/>
+        <a:font script="Laoo" typeface="DokChampa"/>
+        <a:font script="Sinh" typeface="Iskoola Pota"/>
+        <a:font script="Mong" typeface="Mongolian Baiti"/>
+        <a:font script="Viet" typeface="Arial"/>
+        <a:font script="Uigh" typeface="Microsoft Uighur"/>
+        <a:font script="Geor" typeface="Sylfaen"/>
+        <a:font script="Armn" typeface="Arial"/>
+        <a:font script="Bugi" typeface="Leelawadee UI"/>
+        <a:font script="Bopo" typeface="Microsoft JhengHei"/>
+        <a:font script="Java" typeface="Javanese Text"/>
+        <a:font script="Lisu" typeface="Segoe UI"/>
+        <a:font script="Mymr" typeface="Myanmar Text"/>
+        <a:font script="Nkoo" typeface="Ebrima"/>
+        <a:font script="Olck" typeface="Nirmala UI"/>
+        <a:font script="Osma" typeface="Ebrima"/>
+        <a:font script="Phag" typeface="Phagspa"/>
+        <a:font script="Syrn" typeface="Estrangelo Edessa"/>
+        <a:font script="Syrj" typeface="Estrangelo Edessa"/>
+        <a:font script="Syre" typeface="Estrangelo Edessa"/>
+        <a:font script="Sora" typeface="Nirmala UI"/>
+        <a:font script="Tale" typeface="Microsoft Tai Le"/>
+        <a:font script="Talu" typeface="Microsoft New Tai Lue"/>
+        <a:font script="Tfng" typeface="Ebrima"/>
+      </a:minorFont>
+    </a:fontScheme>
+    <a:fmtScheme name="Office">
+      <a:fillStyleLst>
+        <a:solidFill>
+          <a:schemeClr val="phClr"/>
+        </a:solidFill>
+        <a:gradFill rotWithShape="1">
+          <a:gsLst>
+            <a:gs pos="0">
+              <a:schemeClr val="phClr">
+                <a:lumMod val="110000"/>
+                <a:satMod val="105000"/>
+                <a:tint val="67000"/>
+              </a:schemeClr>
+            </a:gs>
+            <a:gs pos="50000">
+              <a:schemeClr val="phClr">
+                <a:lumMod val="105000"/>
+                <a:satMod val="103000"/>
+                <a:tint val="73000"/>
+              </a:schemeClr>
+            </a:gs>
+            <a:gs pos="100000">
+              <a:schemeClr val="phClr">
+                <a:lumMod val="105000"/>
+                <a:satMod val="109000"/>
+                <a:tint val="81000"/>
+              </a:schemeClr>
+            </a:gs>
+          </a:gsLst>
+          <a:lin ang="5400000" scaled="0"/>
+        </a:gradFill>
+        <a:gradFill rotWithShape="1">
+          <a:gsLst>
+            <a:gs pos="0">
+              <a:schemeClr val="phClr">
+                <a:satMod val="103000"/>
+                <a:lumMod val="102000"/>
+                <a:tint val="94000"/>
+              </a:schemeClr>
+            </a:gs>
+            <a:gs pos="50000">
+              <a:schemeClr val="phClr">
+                <a:satMod val="110000"/>
+                <a:lumMod val="100000"/>
+                <a:shade val="100000"/>
+              </a:schemeClr>
+            </a:gs>
+            <a:gs pos="100000">
+              <a:schemeClr val="phClr">
+                <a:lumMod val="99000"/>
+                <a:satMod val="120000"/>
+                <a:shade val="78000"/>
+              </a:schemeClr>
+            </a:gs>
+          </a:gsLst>
+          <a:lin ang="5400000" scaled="0"/>
+        </a:gradFill>
+      </a:fillStyleLst>
+      <a:lnStyleLst>
+        <a:ln w="12700" cap="flat" cmpd="sng" algn="ctr">
+          <a:solidFill>
+            <a:schemeClr val="phClr"/>
+          </a:solidFill>
+          <a:prstDash val="solid"/>
+          <a:miter lim="800000"/>
+        </a:ln>
+        <a:ln w="19050" cap="flat" cmpd="sng" algn="ctr">
+          <a:solidFill>
+            <a:schemeClr val="phClr"/>
+          </a:solidFill>
+          <a:prstDash val="solid"/>
+          <a:miter lim="800000"/>
+        </a:ln>
+        <a:ln w="25400" cap="flat" cmpd="sng" algn="ctr">
+          <a:solidFill>
+            <a:schemeClr val="phClr"/>
+          </a:solidFill>
+          <a:prstDash val="solid"/>
+          <a:miter lim="800000"/>
+        </a:ln>
+      </a:lnStyleLst>
+      <a:effectStyleLst>
+        <a:effectStyle>
+          <a:effectLst/>
+        </a:effectStyle>
+        <a:effectStyle>
+          <a:effectLst/>
+        </a:effectStyle>
+        <a:effectStyle>
+          <a:effectLst>
+            <a:outerShdw blurRad="57150" dist="19050" dir="5400000" algn="ctr" rotWithShape="0">
+              <a:srgbClr val="000000">
+                <a:alpha val="63000"/>
+              </a:srgbClr>
+            </a:outerShdw>
+          </a:effectLst>
+        </a:effectStyle>
+      </a:effectStyleLst>
+      <a:bgFillStyleLst>
+        <a:solidFill>
+          <a:schemeClr val="phClr"/>
+        </a:solidFill>
+        <a:solidFill>
+          <a:schemeClr val="phClr">
+            <a:tint val="95000"/>
+            <a:satMod val="170000"/>
+          </a:schemeClr>
+        </a:solidFill>
+        <a:gradFill rotWithShape="1">
+          <a:gsLst>
+            <a:gs pos="0">
+              <a:schemeClr val="phClr">
+                <a:tint val="93000"/>
+                <a:satMod val="150000"/>
+                <a:shade val="98000"/>
+                <a:lumMod val="102000"/>
+              </a:schemeClr>
+            </a:gs>
+            <a:gs pos="50000">
+              <a:schemeClr val="phClr">
+                <a:tint val="98000"/>
+                <a:satMod val="130000"/>
+                <a:shade val="90000"/>
+                <a:lumMod val="103000"/>
+              </a:schemeClr>
+            </a:gs>
+            <a:gs pos="100000">
+              <a:schemeClr val="phClr">
+                <a:shade val="63000"/>
+                <a:satMod val="120000"/>
+              </a:schemeClr>
+            </a:gs>
+          </a:gsLst>
+          <a:lin ang="5400000" scaled="0"/>
+        </a:gradFill>
+      </a:bgFillStyleLst>
+    </a:fmtScheme>
+  </a:themeElements>
+  <a:objectDefaults>
+    <a:lnDef>
+      <a:spPr/>
+      <a:bodyPr/>
+      <a:lstStyle/>
+      <a:style>
+        <a:lnRef idx="2">
+          <a:schemeClr val="accent1"/>
+        </a:lnRef>
+        <a:fillRef idx="0">
+          <a:schemeClr val="accent1"/>
+        </a:fillRef>
+        <a:effectRef idx="1">
+          <a:schemeClr val="accent1"/>
+        </a:effectRef>
+        <a:fontRef idx="minor">
+          <a:schemeClr val="tx1"/>
+        </a:fontRef>
+      </a:style>
+    </a:lnDef>
+  </a:objectDefaults>
+  <a:extraClrSchemeLst/>
+  <a:extLst>
+    <a:ext uri="{05A4C25C-085E-4340-85A3-A5531E510DB2}">
+      <thm15:themeFamily xmlns:thm15="http://schemas.microsoft.com/office/thememl/2012/main" name="Office Theme" id="{2E142A2C-CD16-42D6-873A-C26D2A0506FA}" vid="{1BDDFF52-6CD6-40A5-AB3C-68EB2F1E4D0A}"/>
+    </a:ext>
+  </a:extLst>
+</a:theme>
 </file>
--- a/Sprint1_Presentation.pptx
+++ b/Sprint1_Presentation.pptx
@@ -2377,57 +2377,6 @@
       </p:sp>
       <p:sp>
         <p:nvSpPr>
-          <p:cNvPr id="12" name="Text 10"/>
-          <p:cNvSpPr/>
-          <p:nvPr/>
-        </p:nvSpPr>
-        <p:spPr>
-          <a:xfrm>
-            <a:off x="9928225" y="2261344"/>
-            <a:ext cx="1263650" cy="313680"/>
-          </a:xfrm>
-          <a:prstGeom prst="roundRect">
-            <a:avLst>
-              <a:gd name="adj" fmla="val 15183"/>
-            </a:avLst>
-          </a:prstGeom>
-          <a:noFill/>
-          <a:ln w="6350">
-            <a:solidFill>
-              <a:srgbClr val="9A9486"/>
-            </a:solidFill>
-            <a:prstDash val="solid"/>
-          </a:ln>
-        </p:spPr>
-        <p:txBody>
-          <a:bodyPr wrap="square" lIns="0" tIns="27326" rIns="0" bIns="1926" rtlCol="0" anchor="t">
-            <a:normAutofit/>
-          </a:bodyPr>
-          <a:lstStyle/>
-          <a:p>
-            <a:pPr marL="0" indent="0" algn="ctr">
-              <a:lnSpc>
-                <a:spcPts val="1820"/>
-              </a:lnSpc>
-              <a:buNone/>
-            </a:pPr>
-            <a:r>
-              <a:rPr lang="en-US" sz="1300" dirty="0">
-                <a:solidFill>
-                  <a:srgbClr val="5B5648"/>
-                </a:solidFill>
-                <a:latin typeface="Helvetica Neue" pitchFamily="34" charset="0"/>
-                <a:ea typeface="Helvetica Neue" pitchFamily="34" charset="-122"/>
-                <a:cs typeface="Helvetica Neue" pitchFamily="34" charset="-120"/>
-              </a:rPr>
-              <a:t>To do</a:t>
-            </a:r>
-            <a:endParaRPr lang="en-US" sz="1300" dirty="0"/>
-          </a:p>
-        </p:txBody>
-      </p:sp>
-      <p:sp>
-        <p:nvSpPr>
           <p:cNvPr id="13" name="Shape 11"/>
           <p:cNvSpPr/>
           <p:nvPr/>
@@ -3327,6 +3276,46 @@
       </p:sp>
       <p:sp>
         <p:nvSpPr>
+          <p:cNvPr id="40" name="Shape 26">
+            <a:extLst>
+              <a:ext uri="{FF2B5EF4-FFF2-40B4-BE49-F238E27FC236}">
+                <a16:creationId xmlns:a16="http://schemas.microsoft.com/office/drawing/2014/main" id="{31201B64-AA2F-6E44-1C6C-D84392B7A1D9}"/>
+              </a:ext>
+            </a:extLst>
+          </p:cNvPr>
+          <p:cNvSpPr/>
+          <p:nvPr/>
+        </p:nvSpPr>
+        <p:spPr>
+          <a:xfrm>
+            <a:off x="819150" y="5048746"/>
+            <a:ext cx="10553700" cy="479375"/>
+          </a:xfrm>
+          <a:prstGeom prst="roundRect">
+            <a:avLst>
+              <a:gd name="adj" fmla="val 14571"/>
+            </a:avLst>
+          </a:prstGeom>
+          <a:solidFill>
+            <a:srgbClr val="FDEEE0"/>
+          </a:solidFill>
+          <a:ln w="12700">
+            <a:solidFill>
+              <a:srgbClr val="E8833A"/>
+            </a:solidFill>
+            <a:prstDash val="solid"/>
+          </a:ln>
+        </p:spPr>
+        <p:txBody>
+          <a:bodyPr/>
+          <a:lstStyle/>
+          <a:p>
+            <a:endParaRPr lang="en-US"/>
+          </a:p>
+        </p:txBody>
+      </p:sp>
+      <p:sp>
+        <p:nvSpPr>
           <p:cNvPr id="34" name="Text 32"/>
           <p:cNvSpPr/>
           <p:nvPr/>
@@ -3377,7 +3366,7 @@
         </p:nvSpPr>
         <p:spPr>
           <a:xfrm>
-            <a:off x="1530350" y="5170884"/>
+            <a:off x="1491742" y="5170884"/>
             <a:ext cx="7430008" cy="292100"/>
           </a:xfrm>
           <a:prstGeom prst="rect">
@@ -3459,30 +3448,113 @@
       </p:sp>
       <p:sp>
         <p:nvSpPr>
-          <p:cNvPr id="37" name="Text 35"/>
-          <p:cNvSpPr/>
-          <p:nvPr/>
-        </p:nvSpPr>
-        <p:spPr>
-          <a:xfrm>
-            <a:off x="9928225" y="5147419"/>
-            <a:ext cx="1263650" cy="313680"/>
+          <p:cNvPr id="38" name="Text 36"/>
+          <p:cNvSpPr/>
+          <p:nvPr/>
+        </p:nvSpPr>
+        <p:spPr>
+          <a:xfrm>
+            <a:off x="1126309" y="5904656"/>
+            <a:ext cx="10883392" cy="274290"/>
+          </a:xfrm>
+          <a:prstGeom prst="rect">
+            <a:avLst/>
+          </a:prstGeom>
+          <a:noFill/>
+          <a:ln/>
+        </p:spPr>
+        <p:txBody>
+          <a:bodyPr wrap="square" lIns="0" tIns="0" rIns="0" bIns="0" rtlCol="0" anchor="t">
+            <a:normAutofit/>
+          </a:bodyPr>
+          <a:lstStyle/>
+          <a:p>
+            <a:pPr marL="0" indent="0" algn="l">
+              <a:lnSpc>
+                <a:spcPts val="1960"/>
+              </a:lnSpc>
+              <a:buNone/>
+            </a:pPr>
+            <a:r>
+              <a:rPr lang="en-US" sz="1400" dirty="0">
+                <a:solidFill>
+                  <a:srgbClr val="5B5648"/>
+                </a:solidFill>
+                <a:latin typeface="Helvetica Neue" pitchFamily="34" charset="0"/>
+                <a:ea typeface="Helvetica Neue" pitchFamily="34" charset="-122"/>
+                <a:cs typeface="Helvetica Neue" pitchFamily="34" charset="-120"/>
+              </a:rPr>
+              <a:t>2</a:t>
+            </a:r>
+            <a:r>
+              <a:rPr lang="en-US" sz="1400">
+                <a:solidFill>
+                  <a:srgbClr val="5B5648"/>
+                </a:solidFill>
+                <a:latin typeface="Helvetica Neue" pitchFamily="34" charset="0"/>
+                <a:ea typeface="Helvetica Neue" pitchFamily="34" charset="-122"/>
+                <a:cs typeface="Helvetica Neue" pitchFamily="34" charset="-120"/>
+              </a:rPr>
+              <a:t> </a:t>
+            </a:r>
+            <a:r>
+              <a:rPr lang="en-US" sz="1400" dirty="0">
+                <a:solidFill>
+                  <a:srgbClr val="5B5648"/>
+                </a:solidFill>
+                <a:latin typeface="Helvetica Neue" pitchFamily="34" charset="0"/>
+                <a:ea typeface="Helvetica Neue" pitchFamily="34" charset="-122"/>
+                <a:cs typeface="Helvetica Neue" pitchFamily="34" charset="-120"/>
+              </a:rPr>
+              <a:t>of 7 </a:t>
+            </a:r>
+            <a:r>
+              <a:rPr lang="en-US" sz="1400">
+                <a:solidFill>
+                  <a:srgbClr val="5B5648"/>
+                </a:solidFill>
+                <a:latin typeface="Helvetica Neue" pitchFamily="34" charset="0"/>
+                <a:ea typeface="Helvetica Neue" pitchFamily="34" charset="-122"/>
+                <a:cs typeface="Helvetica Neue" pitchFamily="34" charset="-120"/>
+              </a:rPr>
+              <a:t>issues complete</a:t>
+            </a:r>
+            <a:endParaRPr lang="en-US" sz="1400" dirty="0"/>
+          </a:p>
+        </p:txBody>
+      </p:sp>
+      <p:sp>
+        <p:nvSpPr>
+          <p:cNvPr id="39" name="Text 15">
+            <a:extLst>
+              <a:ext uri="{FF2B5EF4-FFF2-40B4-BE49-F238E27FC236}">
+                <a16:creationId xmlns:a16="http://schemas.microsoft.com/office/drawing/2014/main" id="{2318401C-AC01-A4A9-BE8F-0C1EB1518B8B}"/>
+              </a:ext>
+            </a:extLst>
+          </p:cNvPr>
+          <p:cNvSpPr/>
+          <p:nvPr/>
+        </p:nvSpPr>
+        <p:spPr>
+          <a:xfrm>
+            <a:off x="9934575" y="2279973"/>
+            <a:ext cx="1250950" cy="326380"/>
           </a:xfrm>
           <a:prstGeom prst="roundRect">
             <a:avLst>
-              <a:gd name="adj" fmla="val 15183"/>
+              <a:gd name="adj" fmla="val 12646"/>
             </a:avLst>
           </a:prstGeom>
           <a:noFill/>
-          <a:ln w="6350">
+          <a:ln w="19050">
             <a:solidFill>
-              <a:srgbClr val="9A9486"/>
+              <a:srgbClr val="E8833A"/>
             </a:solidFill>
             <a:prstDash val="solid"/>
           </a:ln>
         </p:spPr>
         <p:txBody>
-          <a:bodyPr wrap="square" lIns="0" tIns="27326" rIns="0" bIns="1926" rtlCol="0" anchor="t">
+          <a:bodyPr wrap="square" lIns="0" tIns="35536" rIns="0" bIns="10136" rtlCol="0" anchor="t">
             <a:normAutofit/>
           </a:bodyPr>
           <a:lstStyle/>
@@ -3502,7 +3574,7 @@
                 <a:ea typeface="Helvetica Neue" pitchFamily="34" charset="-122"/>
                 <a:cs typeface="Helvetica Neue" pitchFamily="34" charset="-120"/>
               </a:rPr>
-              <a:t>To do</a:t>
+              <a:t>In Progress</a:t>
             </a:r>
             <a:endParaRPr lang="en-US" sz="1300" dirty="0"/>
           </a:p>
@@ -3510,45 +3582,55 @@
       </p:sp>
       <p:sp>
         <p:nvSpPr>
-          <p:cNvPr id="38" name="Text 36"/>
-          <p:cNvSpPr/>
-          <p:nvPr/>
-        </p:nvSpPr>
-        <p:spPr>
-          <a:xfrm>
-            <a:off x="812800" y="5797550"/>
-            <a:ext cx="10883392" cy="274290"/>
-          </a:xfrm>
-          <a:prstGeom prst="rect">
-            <a:avLst/>
-          </a:prstGeom>
-          <a:noFill/>
+          <p:cNvPr id="41" name="Text 30">
+            <a:extLst>
+              <a:ext uri="{FF2B5EF4-FFF2-40B4-BE49-F238E27FC236}">
+                <a16:creationId xmlns:a16="http://schemas.microsoft.com/office/drawing/2014/main" id="{F317C1EF-C3DE-1B7A-461B-AC2314BA5666}"/>
+              </a:ext>
+            </a:extLst>
+          </p:cNvPr>
+          <p:cNvSpPr/>
+          <p:nvPr/>
+        </p:nvSpPr>
+        <p:spPr>
+          <a:xfrm>
+            <a:off x="9921875" y="5134768"/>
+            <a:ext cx="1270000" cy="307330"/>
+          </a:xfrm>
+          <a:prstGeom prst="roundRect">
+            <a:avLst>
+              <a:gd name="adj" fmla="val 16529"/>
+            </a:avLst>
+          </a:prstGeom>
+          <a:solidFill>
+            <a:srgbClr val="E8833A"/>
+          </a:solidFill>
           <a:ln/>
         </p:spPr>
         <p:txBody>
-          <a:bodyPr wrap="square" lIns="0" tIns="0" rIns="0" bIns="0" rtlCol="0" anchor="t">
+          <a:bodyPr wrap="square" lIns="0" tIns="23221" rIns="0" bIns="0" rtlCol="0" anchor="t">
             <a:normAutofit/>
           </a:bodyPr>
           <a:lstStyle/>
           <a:p>
-            <a:pPr marL="0" indent="0" algn="l">
-              <a:lnSpc>
-                <a:spcPts val="1960"/>
+            <a:pPr marL="0" indent="0" algn="ctr">
+              <a:lnSpc>
+                <a:spcPts val="1820"/>
               </a:lnSpc>
               <a:buNone/>
             </a:pPr>
             <a:r>
-              <a:rPr lang="en-US" sz="1400" dirty="0">
-                <a:solidFill>
-                  <a:srgbClr val="5B5648"/>
-                </a:solidFill>
-                <a:latin typeface="Helvetica Neue" pitchFamily="34" charset="0"/>
-                <a:ea typeface="Helvetica Neue" pitchFamily="34" charset="-122"/>
-                <a:cs typeface="Helvetica Neue" pitchFamily="34" charset="-120"/>
-              </a:rPr>
-              <a:t>1 of 7 issues complete · Issue #6 delivered: Obsidian vault, MOC and prompts_and_logs/ archive</a:t>
-            </a:r>
-            <a:endParaRPr lang="en-US" sz="1400" dirty="0"/>
+              <a:rPr lang="en-US" sz="1300" b="1" dirty="0">
+                <a:solidFill>
+                  <a:srgbClr val="14181F"/>
+                </a:solidFill>
+                <a:latin typeface="Helvetica Neue" pitchFamily="34" charset="0"/>
+                <a:ea typeface="Helvetica Neue" pitchFamily="34" charset="-122"/>
+                <a:cs typeface="Helvetica Neue" pitchFamily="34" charset="-120"/>
+              </a:rPr>
+              <a:t>Complete</a:t>
+            </a:r>
+            <a:endParaRPr lang="en-US" sz="1300" dirty="0"/>
           </a:p>
         </p:txBody>
       </p:sp>
@@ -5601,7 +5683,7 @@
           <a:p>
             <a:r>
               <a:rPr lang="en-US" sz="1200"/>
-              <a:t>Created base2_softmax.py, implementing a Q15 exponential with a 64-entry fractional LUT, fixed-point score quantization, and the online max/sum recurrence. Its attention path processes key/value blocks and avoids materializing an N×N score matrix. Added usage and precision notes to README.md.</a:t>
+              <a:t>Created base2_softmax.py, implementing a Q15 exponential with a 64-entry fractional LUT, fixed-point score quantization, and the online max/sum recurrence. Its attention path processes key/value blocks and avoids materializing an N×N score matrix. </a:t>
             </a:r>
           </a:p>
           <a:p>
@@ -5939,7 +6021,7 @@
         <p:spPr>
           <a:xfrm>
             <a:off x="812800" y="3603575"/>
-            <a:ext cx="10566400" cy="1582390"/>
+            <a:ext cx="10566400" cy="2239876"/>
           </a:xfrm>
           <a:prstGeom prst="roundRect">
             <a:avLst>
@@ -6012,7 +6094,7 @@
         <p:spPr>
           <a:xfrm>
             <a:off x="1144270" y="4131866"/>
-            <a:ext cx="10275062" cy="825500"/>
+            <a:ext cx="10275062" cy="2519014"/>
           </a:xfrm>
           <a:prstGeom prst="rect">
             <a:avLst/>
@@ -6084,8 +6166,63 @@
                 <a:ea typeface="Helvetica Neue" pitchFamily="34" charset="-122"/>
                 <a:cs typeface="Helvetica Neue" pitchFamily="34" charset="-120"/>
               </a:rPr>
-              <a:t>Prepare tests and firmware tooling for out of the box testing once procured</a:t>
-            </a:r>
+              <a:t>Prepare tests and firmware tooling for out of the box testing </a:t>
+            </a:r>
+            <a:r>
+              <a:rPr lang="en-US" sz="1500">
+                <a:solidFill>
+                  <a:srgbClr val="FAF9F5"/>
+                </a:solidFill>
+                <a:latin typeface="Helvetica Neue" pitchFamily="34" charset="0"/>
+                <a:ea typeface="Helvetica Neue" pitchFamily="34" charset="-122"/>
+                <a:cs typeface="Helvetica Neue" pitchFamily="34" charset="-120"/>
+              </a:rPr>
+              <a:t>once procured</a:t>
+            </a:r>
+          </a:p>
+          <a:p>
+            <a:pPr marL="176530" indent="-176530">
+              <a:buSzPct val="100000"/>
+              <a:buChar char="•"/>
+            </a:pPr>
+            <a:r>
+              <a:rPr lang="en-US" sz="1600"/>
+              <a:t>Big assumption here is that this softmax trick WILL be faster when implemented on RTL in the co-design architecture. This will need to be tested. From this simulation we know the algorithm will be accurate, but is it more time and power efficient vs the memory extensive attention score Softmax.</a:t>
+            </a:r>
+            <a:endParaRPr lang="en-US" sz="1500">
+              <a:solidFill>
+                <a:srgbClr val="FAF9F5"/>
+              </a:solidFill>
+              <a:latin typeface="Helvetica Neue" pitchFamily="34" charset="0"/>
+              <a:ea typeface="Helvetica Neue" pitchFamily="34" charset="-122"/>
+              <a:cs typeface="Helvetica Neue" pitchFamily="34" charset="-120"/>
+            </a:endParaRPr>
+          </a:p>
+          <a:p>
+            <a:pPr marL="176530" indent="-176530" algn="l">
+              <a:lnSpc>
+                <a:spcPts val="2100"/>
+              </a:lnSpc>
+              <a:buSzPct val="100000"/>
+              <a:buChar char="•"/>
+            </a:pPr>
+            <a:endParaRPr lang="en-US" sz="1500">
+              <a:solidFill>
+                <a:srgbClr val="FAF9F5"/>
+              </a:solidFill>
+              <a:latin typeface="Helvetica Neue" pitchFamily="34" charset="0"/>
+              <a:ea typeface="Helvetica Neue" pitchFamily="34" charset="-122"/>
+              <a:cs typeface="Helvetica Neue" pitchFamily="34" charset="-120"/>
+            </a:endParaRPr>
+          </a:p>
+          <a:p>
+            <a:pPr marL="176530" indent="-176530" algn="l">
+              <a:lnSpc>
+                <a:spcPct val="100000"/>
+              </a:lnSpc>
+              <a:buSzPct val="100000"/>
+              <a:buChar char="•"/>
+            </a:pPr>
             <a:endParaRPr lang="en-US" sz="1500" dirty="0"/>
           </a:p>
         </p:txBody>
